--- a/prompt_engineering/pe-4-advanced-TreeOfThought-Reflexion-SelfConsistency-v2.pptx
+++ b/prompt_engineering/pe-4-advanced-TreeOfThought-Reflexion-SelfConsistency-v2.pptx
@@ -226,7 +226,7 @@
           <a:p>
             <a:fld id="{7BAEECA8-D063-486F-AE31-5020270C1449}" type="datetimeFigureOut">
               <a:rPr lang="en-US" smtClean="0"/>
-              <a:t>5/8/2026</a:t>
+              <a:t>6/1/2026</a:t>
             </a:fld>
             <a:endParaRPr lang="en-US"/>
           </a:p>
@@ -468,7 +468,7 @@
           <a:p>
             <a:fld id="{6383FAE1-13DE-4511-8C1B-C8AFB720664C}" type="datetimeFigureOut">
               <a:rPr lang="en-US" smtClean="0"/>
-              <a:t>5/8/2026</a:t>
+              <a:t>6/1/2026</a:t>
             </a:fld>
             <a:endParaRPr lang="en-US"/>
           </a:p>
@@ -666,7 +666,7 @@
           <a:p>
             <a:fld id="{6383FAE1-13DE-4511-8C1B-C8AFB720664C}" type="datetimeFigureOut">
               <a:rPr lang="en-US" smtClean="0"/>
-              <a:t>5/8/2026</a:t>
+              <a:t>6/1/2026</a:t>
             </a:fld>
             <a:endParaRPr lang="en-US"/>
           </a:p>
@@ -874,7 +874,7 @@
           <a:p>
             <a:fld id="{6383FAE1-13DE-4511-8C1B-C8AFB720664C}" type="datetimeFigureOut">
               <a:rPr lang="en-US" smtClean="0"/>
-              <a:t>5/8/2026</a:t>
+              <a:t>6/1/2026</a:t>
             </a:fld>
             <a:endParaRPr lang="en-US"/>
           </a:p>
@@ -1072,7 +1072,7 @@
           <a:p>
             <a:fld id="{6383FAE1-13DE-4511-8C1B-C8AFB720664C}" type="datetimeFigureOut">
               <a:rPr lang="en-US" smtClean="0"/>
-              <a:t>5/8/2026</a:t>
+              <a:t>6/1/2026</a:t>
             </a:fld>
             <a:endParaRPr lang="en-US"/>
           </a:p>
@@ -1347,7 +1347,7 @@
           <a:p>
             <a:fld id="{6383FAE1-13DE-4511-8C1B-C8AFB720664C}" type="datetimeFigureOut">
               <a:rPr lang="en-US" smtClean="0"/>
-              <a:t>5/8/2026</a:t>
+              <a:t>6/1/2026</a:t>
             </a:fld>
             <a:endParaRPr lang="en-US"/>
           </a:p>
@@ -1612,7 +1612,7 @@
           <a:p>
             <a:fld id="{6383FAE1-13DE-4511-8C1B-C8AFB720664C}" type="datetimeFigureOut">
               <a:rPr lang="en-US" smtClean="0"/>
-              <a:t>5/8/2026</a:t>
+              <a:t>6/1/2026</a:t>
             </a:fld>
             <a:endParaRPr lang="en-US"/>
           </a:p>
@@ -2024,7 +2024,7 @@
           <a:p>
             <a:fld id="{6383FAE1-13DE-4511-8C1B-C8AFB720664C}" type="datetimeFigureOut">
               <a:rPr lang="en-US" smtClean="0"/>
-              <a:t>5/8/2026</a:t>
+              <a:t>6/1/2026</a:t>
             </a:fld>
             <a:endParaRPr lang="en-US"/>
           </a:p>
@@ -2165,7 +2165,7 @@
           <a:p>
             <a:fld id="{6383FAE1-13DE-4511-8C1B-C8AFB720664C}" type="datetimeFigureOut">
               <a:rPr lang="en-US" smtClean="0"/>
-              <a:t>5/8/2026</a:t>
+              <a:t>6/1/2026</a:t>
             </a:fld>
             <a:endParaRPr lang="en-US"/>
           </a:p>
@@ -2278,7 +2278,7 @@
           <a:p>
             <a:fld id="{6383FAE1-13DE-4511-8C1B-C8AFB720664C}" type="datetimeFigureOut">
               <a:rPr lang="en-US" smtClean="0"/>
-              <a:t>5/8/2026</a:t>
+              <a:t>6/1/2026</a:t>
             </a:fld>
             <a:endParaRPr lang="en-US"/>
           </a:p>
@@ -2589,7 +2589,7 @@
           <a:p>
             <a:fld id="{6383FAE1-13DE-4511-8C1B-C8AFB720664C}" type="datetimeFigureOut">
               <a:rPr lang="en-US" smtClean="0"/>
-              <a:t>5/8/2026</a:t>
+              <a:t>6/1/2026</a:t>
             </a:fld>
             <a:endParaRPr lang="en-US"/>
           </a:p>
@@ -2880,7 +2880,7 @@
           <a:p>
             <a:fld id="{6383FAE1-13DE-4511-8C1B-C8AFB720664C}" type="datetimeFigureOut">
               <a:rPr lang="en-US" smtClean="0"/>
-              <a:t>5/8/2026</a:t>
+              <a:t>6/1/2026</a:t>
             </a:fld>
             <a:endParaRPr lang="en-US"/>
           </a:p>
@@ -3124,7 +3124,7 @@
           <a:p>
             <a:fld id="{6383FAE1-13DE-4511-8C1B-C8AFB720664C}" type="datetimeFigureOut">
               <a:rPr lang="en-US" smtClean="0"/>
-              <a:t>5/8/2026</a:t>
+              <a:t>6/1/2026</a:t>
             </a:fld>
             <a:endParaRPr lang="en-US"/>
           </a:p>
@@ -4336,7 +4336,29 @@
                   </a:schemeClr>
                 </a:solidFill>
               </a:rPr>
-              <a:t>Solve this math problem using three different reasoning methods.</a:t>
+              <a:t>Solve this math problem using three different </a:t>
+            </a:r>
+            <a:r>
+              <a:rPr lang="en-US" sz="2400" b="1" dirty="0">
+                <a:solidFill>
+                  <a:schemeClr val="accent4">
+                    <a:lumMod val="60000"/>
+                    <a:lumOff val="40000"/>
+                  </a:schemeClr>
+                </a:solidFill>
+              </a:rPr>
+              <a:t>reasoning methods</a:t>
+            </a:r>
+            <a:r>
+              <a:rPr lang="en-US" sz="2400" dirty="0">
+                <a:solidFill>
+                  <a:schemeClr val="accent4">
+                    <a:lumMod val="60000"/>
+                    <a:lumOff val="40000"/>
+                  </a:schemeClr>
+                </a:solidFill>
+              </a:rPr>
+              <a:t>.</a:t>
             </a:r>
           </a:p>
           <a:p>

--- a/prompt_engineering/pe-4-advanced-TreeOfThought-Reflexion-SelfConsistency-v2.pptx
+++ b/prompt_engineering/pe-4-advanced-TreeOfThought-Reflexion-SelfConsistency-v2.pptx
@@ -5,24 +5,30 @@
     <p:sldMasterId id="2147483648" r:id="rId1"/>
   </p:sldMasterIdLst>
   <p:handoutMasterIdLst>
-    <p:handoutMasterId r:id="rId17"/>
+    <p:handoutMasterId r:id="rId23"/>
   </p:handoutMasterIdLst>
   <p:sldIdLst>
     <p:sldId id="257" r:id="rId2"/>
     <p:sldId id="258" r:id="rId3"/>
-    <p:sldId id="270" r:id="rId4"/>
-    <p:sldId id="271" r:id="rId5"/>
-    <p:sldId id="272" r:id="rId6"/>
-    <p:sldId id="273" r:id="rId7"/>
-    <p:sldId id="274" r:id="rId8"/>
-    <p:sldId id="275" r:id="rId9"/>
-    <p:sldId id="276" r:id="rId10"/>
-    <p:sldId id="277" r:id="rId11"/>
-    <p:sldId id="278" r:id="rId12"/>
-    <p:sldId id="279" r:id="rId13"/>
-    <p:sldId id="280" r:id="rId14"/>
-    <p:sldId id="281" r:id="rId15"/>
-    <p:sldId id="269" r:id="rId16"/>
+    <p:sldId id="282" r:id="rId4"/>
+    <p:sldId id="270" r:id="rId5"/>
+    <p:sldId id="271" r:id="rId6"/>
+    <p:sldId id="272" r:id="rId7"/>
+    <p:sldId id="284" r:id="rId8"/>
+    <p:sldId id="285" r:id="rId9"/>
+    <p:sldId id="286" r:id="rId10"/>
+    <p:sldId id="287" r:id="rId11"/>
+    <p:sldId id="283" r:id="rId12"/>
+    <p:sldId id="273" r:id="rId13"/>
+    <p:sldId id="274" r:id="rId14"/>
+    <p:sldId id="275" r:id="rId15"/>
+    <p:sldId id="276" r:id="rId16"/>
+    <p:sldId id="277" r:id="rId17"/>
+    <p:sldId id="278" r:id="rId18"/>
+    <p:sldId id="279" r:id="rId19"/>
+    <p:sldId id="280" r:id="rId20"/>
+    <p:sldId id="281" r:id="rId21"/>
+    <p:sldId id="269" r:id="rId22"/>
   </p:sldIdLst>
   <p:sldSz cx="12192000" cy="6858000"/>
   <p:notesSz cx="6858000" cy="9144000"/>
@@ -226,7 +232,7 @@
           <a:p>
             <a:fld id="{7BAEECA8-D063-486F-AE31-5020270C1449}" type="datetimeFigureOut">
               <a:rPr lang="en-US" smtClean="0"/>
-              <a:t>6/1/2026</a:t>
+              <a:t>6/16/2026</a:t>
             </a:fld>
             <a:endParaRPr lang="en-US"/>
           </a:p>
@@ -468,7 +474,7 @@
           <a:p>
             <a:fld id="{6383FAE1-13DE-4511-8C1B-C8AFB720664C}" type="datetimeFigureOut">
               <a:rPr lang="en-US" smtClean="0"/>
-              <a:t>6/1/2026</a:t>
+              <a:t>6/16/2026</a:t>
             </a:fld>
             <a:endParaRPr lang="en-US"/>
           </a:p>
@@ -666,7 +672,7 @@
           <a:p>
             <a:fld id="{6383FAE1-13DE-4511-8C1B-C8AFB720664C}" type="datetimeFigureOut">
               <a:rPr lang="en-US" smtClean="0"/>
-              <a:t>6/1/2026</a:t>
+              <a:t>6/16/2026</a:t>
             </a:fld>
             <a:endParaRPr lang="en-US"/>
           </a:p>
@@ -874,7 +880,7 @@
           <a:p>
             <a:fld id="{6383FAE1-13DE-4511-8C1B-C8AFB720664C}" type="datetimeFigureOut">
               <a:rPr lang="en-US" smtClean="0"/>
-              <a:t>6/1/2026</a:t>
+              <a:t>6/16/2026</a:t>
             </a:fld>
             <a:endParaRPr lang="en-US"/>
           </a:p>
@@ -1072,7 +1078,7 @@
           <a:p>
             <a:fld id="{6383FAE1-13DE-4511-8C1B-C8AFB720664C}" type="datetimeFigureOut">
               <a:rPr lang="en-US" smtClean="0"/>
-              <a:t>6/1/2026</a:t>
+              <a:t>6/16/2026</a:t>
             </a:fld>
             <a:endParaRPr lang="en-US"/>
           </a:p>
@@ -1347,7 +1353,7 @@
           <a:p>
             <a:fld id="{6383FAE1-13DE-4511-8C1B-C8AFB720664C}" type="datetimeFigureOut">
               <a:rPr lang="en-US" smtClean="0"/>
-              <a:t>6/1/2026</a:t>
+              <a:t>6/16/2026</a:t>
             </a:fld>
             <a:endParaRPr lang="en-US"/>
           </a:p>
@@ -1612,7 +1618,7 @@
           <a:p>
             <a:fld id="{6383FAE1-13DE-4511-8C1B-C8AFB720664C}" type="datetimeFigureOut">
               <a:rPr lang="en-US" smtClean="0"/>
-              <a:t>6/1/2026</a:t>
+              <a:t>6/16/2026</a:t>
             </a:fld>
             <a:endParaRPr lang="en-US"/>
           </a:p>
@@ -2024,7 +2030,7 @@
           <a:p>
             <a:fld id="{6383FAE1-13DE-4511-8C1B-C8AFB720664C}" type="datetimeFigureOut">
               <a:rPr lang="en-US" smtClean="0"/>
-              <a:t>6/1/2026</a:t>
+              <a:t>6/16/2026</a:t>
             </a:fld>
             <a:endParaRPr lang="en-US"/>
           </a:p>
@@ -2165,7 +2171,7 @@
           <a:p>
             <a:fld id="{6383FAE1-13DE-4511-8C1B-C8AFB720664C}" type="datetimeFigureOut">
               <a:rPr lang="en-US" smtClean="0"/>
-              <a:t>6/1/2026</a:t>
+              <a:t>6/16/2026</a:t>
             </a:fld>
             <a:endParaRPr lang="en-US"/>
           </a:p>
@@ -2278,7 +2284,7 @@
           <a:p>
             <a:fld id="{6383FAE1-13DE-4511-8C1B-C8AFB720664C}" type="datetimeFigureOut">
               <a:rPr lang="en-US" smtClean="0"/>
-              <a:t>6/1/2026</a:t>
+              <a:t>6/16/2026</a:t>
             </a:fld>
             <a:endParaRPr lang="en-US"/>
           </a:p>
@@ -2589,7 +2595,7 @@
           <a:p>
             <a:fld id="{6383FAE1-13DE-4511-8C1B-C8AFB720664C}" type="datetimeFigureOut">
               <a:rPr lang="en-US" smtClean="0"/>
-              <a:t>6/1/2026</a:t>
+              <a:t>6/16/2026</a:t>
             </a:fld>
             <a:endParaRPr lang="en-US"/>
           </a:p>
@@ -2880,7 +2886,7 @@
           <a:p>
             <a:fld id="{6383FAE1-13DE-4511-8C1B-C8AFB720664C}" type="datetimeFigureOut">
               <a:rPr lang="en-US" smtClean="0"/>
-              <a:t>6/1/2026</a:t>
+              <a:t>6/16/2026</a:t>
             </a:fld>
             <a:endParaRPr lang="en-US"/>
           </a:p>
@@ -3124,7 +3130,7 @@
           <a:p>
             <a:fld id="{6383FAE1-13DE-4511-8C1B-C8AFB720664C}" type="datetimeFigureOut">
               <a:rPr lang="en-US" smtClean="0"/>
-              <a:t>6/1/2026</a:t>
+              <a:t>6/16/2026</a:t>
             </a:fld>
             <a:endParaRPr lang="en-US"/>
           </a:p>
@@ -3727,7 +3733,7 @@
           <a:p>
             <a:pPr algn="ctr"/>
             <a:r>
-              <a:rPr lang="en-US" sz="4000" b="1" dirty="0" err="1">
+              <a:rPr lang="en-US" sz="4000" b="1" dirty="0">
                 <a:solidFill>
                   <a:schemeClr val="accent6">
                     <a:lumMod val="60000"/>
@@ -3737,14 +3743,6 @@
               </a:rPr>
               <a:t>Reflexion</a:t>
             </a:r>
-            <a:endParaRPr lang="en-US" sz="4000" b="1" dirty="0">
-              <a:solidFill>
-                <a:schemeClr val="accent6">
-                  <a:lumMod val="60000"/>
-                  <a:lumOff val="40000"/>
-                </a:schemeClr>
-              </a:solidFill>
-            </a:endParaRPr>
           </a:p>
           <a:p>
             <a:pPr algn="ctr"/>
@@ -3776,6 +3774,1694 @@
 </file>
 
 <file path=ppt/slides/slide10.xml><?xml version="1.0" encoding="utf-8"?>
+<p:sld xmlns:a="http://schemas.openxmlformats.org/drawingml/2006/main" xmlns:r="http://schemas.openxmlformats.org/officeDocument/2006/relationships" xmlns:p="http://schemas.openxmlformats.org/presentationml/2006/main">
+  <p:cSld>
+    <p:spTree>
+      <p:nvGrpSpPr>
+        <p:cNvPr id="1" name="">
+          <a:extLst>
+            <a:ext uri="{FF2B5EF4-FFF2-40B4-BE49-F238E27FC236}">
+              <a16:creationId xmlns:a16="http://schemas.microsoft.com/office/drawing/2014/main" id="{ED80EC34-2B2B-FF64-0BA0-92D68110CD04}"/>
+            </a:ext>
+          </a:extLst>
+        </p:cNvPr>
+        <p:cNvGrpSpPr/>
+        <p:nvPr/>
+      </p:nvGrpSpPr>
+      <p:grpSpPr>
+        <a:xfrm>
+          <a:off x="0" y="0"/>
+          <a:ext cx="0" cy="0"/>
+          <a:chOff x="0" y="0"/>
+          <a:chExt cx="0" cy="0"/>
+        </a:xfrm>
+      </p:grpSpPr>
+      <p:sp>
+        <p:nvSpPr>
+          <p:cNvPr id="4" name="TextBox 3">
+            <a:extLst>
+              <a:ext uri="{FF2B5EF4-FFF2-40B4-BE49-F238E27FC236}">
+                <a16:creationId xmlns:a16="http://schemas.microsoft.com/office/drawing/2014/main" id="{3E4F849B-B488-09ED-EE4A-4048B9B3D8CC}"/>
+              </a:ext>
+            </a:extLst>
+          </p:cNvPr>
+          <p:cNvSpPr txBox="1"/>
+          <p:nvPr/>
+        </p:nvSpPr>
+        <p:spPr>
+          <a:xfrm>
+            <a:off x="210312" y="0"/>
+            <a:ext cx="4453128" cy="5632311"/>
+          </a:xfrm>
+          <a:prstGeom prst="rect">
+            <a:avLst/>
+          </a:prstGeom>
+          <a:noFill/>
+        </p:spPr>
+        <p:txBody>
+          <a:bodyPr wrap="square">
+            <a:spAutoFit/>
+          </a:bodyPr>
+          <a:lstStyle/>
+          <a:p>
+            <a:r>
+              <a:rPr lang="en-US" sz="2000" b="1" dirty="0">
+                <a:solidFill>
+                  <a:schemeClr val="accent6">
+                    <a:lumMod val="60000"/>
+                    <a:lumOff val="40000"/>
+                  </a:schemeClr>
+                </a:solidFill>
+              </a:rPr>
+              <a:t>Branch C: Multi-Agent RAG System</a:t>
+            </a:r>
+          </a:p>
+          <a:p>
+            <a:endParaRPr lang="en-US" sz="2000" dirty="0">
+              <a:solidFill>
+                <a:schemeClr val="accent6">
+                  <a:lumMod val="60000"/>
+                  <a:lumOff val="40000"/>
+                </a:schemeClr>
+              </a:solidFill>
+            </a:endParaRPr>
+          </a:p>
+          <a:p>
+            <a:r>
+              <a:rPr lang="en-US" sz="2000" dirty="0">
+                <a:solidFill>
+                  <a:schemeClr val="accent6">
+                    <a:lumMod val="60000"/>
+                    <a:lumOff val="40000"/>
+                  </a:schemeClr>
+                </a:solidFill>
+              </a:rPr>
+              <a:t>PDF</a:t>
+            </a:r>
+            <a:br>
+              <a:rPr lang="en-US" sz="2000" dirty="0">
+                <a:solidFill>
+                  <a:schemeClr val="accent6">
+                    <a:lumMod val="60000"/>
+                    <a:lumOff val="40000"/>
+                  </a:schemeClr>
+                </a:solidFill>
+              </a:rPr>
+            </a:br>
+            <a:r>
+              <a:rPr lang="en-US" sz="2000" dirty="0">
+                <a:solidFill>
+                  <a:schemeClr val="accent6">
+                    <a:lumMod val="60000"/>
+                    <a:lumOff val="40000"/>
+                  </a:schemeClr>
+                </a:solidFill>
+              </a:rPr>
+              <a:t> ↓</a:t>
+            </a:r>
+            <a:br>
+              <a:rPr lang="en-US" sz="2000" dirty="0">
+                <a:solidFill>
+                  <a:schemeClr val="accent6">
+                    <a:lumMod val="60000"/>
+                    <a:lumOff val="40000"/>
+                  </a:schemeClr>
+                </a:solidFill>
+              </a:rPr>
+            </a:br>
+            <a:r>
+              <a:rPr lang="en-US" sz="2000" dirty="0">
+                <a:solidFill>
+                  <a:schemeClr val="accent6">
+                    <a:lumMod val="60000"/>
+                    <a:lumOff val="40000"/>
+                  </a:schemeClr>
+                </a:solidFill>
+              </a:rPr>
+              <a:t>Document Agent</a:t>
+            </a:r>
+            <a:br>
+              <a:rPr lang="en-US" sz="2000" dirty="0">
+                <a:solidFill>
+                  <a:schemeClr val="accent6">
+                    <a:lumMod val="60000"/>
+                    <a:lumOff val="40000"/>
+                  </a:schemeClr>
+                </a:solidFill>
+              </a:rPr>
+            </a:br>
+            <a:r>
+              <a:rPr lang="en-US" sz="2000" dirty="0">
+                <a:solidFill>
+                  <a:schemeClr val="accent6">
+                    <a:lumMod val="60000"/>
+                    <a:lumOff val="40000"/>
+                  </a:schemeClr>
+                </a:solidFill>
+              </a:rPr>
+              <a:t> ↓</a:t>
+            </a:r>
+            <a:br>
+              <a:rPr lang="en-US" sz="2000" dirty="0">
+                <a:solidFill>
+                  <a:schemeClr val="accent6">
+                    <a:lumMod val="60000"/>
+                    <a:lumOff val="40000"/>
+                  </a:schemeClr>
+                </a:solidFill>
+              </a:rPr>
+            </a:br>
+            <a:r>
+              <a:rPr lang="en-US" sz="2000" dirty="0">
+                <a:solidFill>
+                  <a:schemeClr val="accent6">
+                    <a:lumMod val="60000"/>
+                    <a:lumOff val="40000"/>
+                  </a:schemeClr>
+                </a:solidFill>
+              </a:rPr>
+              <a:t>Retriever Agent</a:t>
+            </a:r>
+            <a:br>
+              <a:rPr lang="en-US" sz="2000" dirty="0">
+                <a:solidFill>
+                  <a:schemeClr val="accent6">
+                    <a:lumMod val="60000"/>
+                    <a:lumOff val="40000"/>
+                  </a:schemeClr>
+                </a:solidFill>
+              </a:rPr>
+            </a:br>
+            <a:r>
+              <a:rPr lang="en-US" sz="2000" dirty="0">
+                <a:solidFill>
+                  <a:schemeClr val="accent6">
+                    <a:lumMod val="60000"/>
+                    <a:lumOff val="40000"/>
+                  </a:schemeClr>
+                </a:solidFill>
+              </a:rPr>
+              <a:t> ↓</a:t>
+            </a:r>
+            <a:br>
+              <a:rPr lang="en-US" sz="2000" dirty="0">
+                <a:solidFill>
+                  <a:schemeClr val="accent6">
+                    <a:lumMod val="60000"/>
+                    <a:lumOff val="40000"/>
+                  </a:schemeClr>
+                </a:solidFill>
+              </a:rPr>
+            </a:br>
+            <a:r>
+              <a:rPr lang="en-US" sz="2000" dirty="0">
+                <a:solidFill>
+                  <a:schemeClr val="accent6">
+                    <a:lumMod val="60000"/>
+                    <a:lumOff val="40000"/>
+                  </a:schemeClr>
+                </a:solidFill>
+              </a:rPr>
+              <a:t>Reasoning Agent</a:t>
+            </a:r>
+            <a:br>
+              <a:rPr lang="en-US" sz="2000" dirty="0">
+                <a:solidFill>
+                  <a:schemeClr val="accent6">
+                    <a:lumMod val="60000"/>
+                    <a:lumOff val="40000"/>
+                  </a:schemeClr>
+                </a:solidFill>
+              </a:rPr>
+            </a:br>
+            <a:r>
+              <a:rPr lang="en-US" sz="2000" dirty="0">
+                <a:solidFill>
+                  <a:schemeClr val="accent6">
+                    <a:lumMod val="60000"/>
+                    <a:lumOff val="40000"/>
+                  </a:schemeClr>
+                </a:solidFill>
+              </a:rPr>
+              <a:t> ↓</a:t>
+            </a:r>
+            <a:br>
+              <a:rPr lang="en-US" sz="2000" dirty="0">
+                <a:solidFill>
+                  <a:schemeClr val="accent6">
+                    <a:lumMod val="60000"/>
+                    <a:lumOff val="40000"/>
+                  </a:schemeClr>
+                </a:solidFill>
+              </a:rPr>
+            </a:br>
+            <a:r>
+              <a:rPr lang="en-US" sz="2000" dirty="0">
+                <a:solidFill>
+                  <a:schemeClr val="accent6">
+                    <a:lumMod val="60000"/>
+                    <a:lumOff val="40000"/>
+                  </a:schemeClr>
+                </a:solidFill>
+              </a:rPr>
+              <a:t>Answer Agent</a:t>
+            </a:r>
+            <a:br>
+              <a:rPr lang="en-US" sz="2000" dirty="0">
+                <a:solidFill>
+                  <a:schemeClr val="accent6">
+                    <a:lumMod val="60000"/>
+                    <a:lumOff val="40000"/>
+                  </a:schemeClr>
+                </a:solidFill>
+              </a:rPr>
+            </a:br>
+            <a:r>
+              <a:rPr lang="en-US" sz="2000" dirty="0">
+                <a:solidFill>
+                  <a:schemeClr val="accent6">
+                    <a:lumMod val="60000"/>
+                    <a:lumOff val="40000"/>
+                  </a:schemeClr>
+                </a:solidFill>
+              </a:rPr>
+              <a:t> ↓</a:t>
+            </a:r>
+            <a:br>
+              <a:rPr lang="en-US" sz="2000" dirty="0">
+                <a:solidFill>
+                  <a:schemeClr val="accent6">
+                    <a:lumMod val="60000"/>
+                    <a:lumOff val="40000"/>
+                  </a:schemeClr>
+                </a:solidFill>
+              </a:rPr>
+            </a:br>
+            <a:r>
+              <a:rPr lang="en-US" sz="2000" dirty="0">
+                <a:solidFill>
+                  <a:schemeClr val="accent6">
+                    <a:lumMod val="60000"/>
+                    <a:lumOff val="40000"/>
+                  </a:schemeClr>
+                </a:solidFill>
+              </a:rPr>
+              <a:t>Final Response</a:t>
+            </a:r>
+          </a:p>
+          <a:p>
+            <a:endParaRPr lang="en-US" sz="2000" dirty="0">
+              <a:solidFill>
+                <a:schemeClr val="accent6">
+                  <a:lumMod val="60000"/>
+                  <a:lumOff val="40000"/>
+                </a:schemeClr>
+              </a:solidFill>
+            </a:endParaRPr>
+          </a:p>
+          <a:p>
+            <a:r>
+              <a:rPr lang="en-US" sz="2000" b="1" dirty="0">
+                <a:solidFill>
+                  <a:schemeClr val="accent6">
+                    <a:lumMod val="60000"/>
+                    <a:lumOff val="40000"/>
+                  </a:schemeClr>
+                </a:solidFill>
+              </a:rPr>
+              <a:t>Components Required: </a:t>
+            </a:r>
+            <a:r>
+              <a:rPr lang="en-US" sz="2000" dirty="0">
+                <a:solidFill>
+                  <a:schemeClr val="accent6">
+                    <a:lumMod val="60000"/>
+                    <a:lumOff val="40000"/>
+                  </a:schemeClr>
+                </a:solidFill>
+              </a:rPr>
+              <a:t>PDF Parser , Vector Database , Multiple Specialized Agents, Agent Orchestrator (</a:t>
+            </a:r>
+            <a:r>
+              <a:rPr lang="en-US" sz="2000" dirty="0" err="1">
+                <a:solidFill>
+                  <a:schemeClr val="accent6">
+                    <a:lumMod val="60000"/>
+                    <a:lumOff val="40000"/>
+                  </a:schemeClr>
+                </a:solidFill>
+              </a:rPr>
+              <a:t>LangGraph</a:t>
+            </a:r>
+            <a:r>
+              <a:rPr lang="en-US" sz="2000" dirty="0">
+                <a:solidFill>
+                  <a:schemeClr val="accent6">
+                    <a:lumMod val="60000"/>
+                    <a:lumOff val="40000"/>
+                  </a:schemeClr>
+                </a:solidFill>
+              </a:rPr>
+              <a:t>, </a:t>
+            </a:r>
+            <a:r>
+              <a:rPr lang="en-US" sz="2000" dirty="0" err="1">
+                <a:solidFill>
+                  <a:schemeClr val="accent6">
+                    <a:lumMod val="60000"/>
+                    <a:lumOff val="40000"/>
+                  </a:schemeClr>
+                </a:solidFill>
+              </a:rPr>
+              <a:t>CrewAI</a:t>
+            </a:r>
+            <a:r>
+              <a:rPr lang="en-US" sz="2000" dirty="0">
+                <a:solidFill>
+                  <a:schemeClr val="accent6">
+                    <a:lumMod val="60000"/>
+                    <a:lumOff val="40000"/>
+                  </a:schemeClr>
+                </a:solidFill>
+              </a:rPr>
+              <a:t>), LLM</a:t>
+            </a:r>
+          </a:p>
+        </p:txBody>
+      </p:sp>
+      <p:sp>
+        <p:nvSpPr>
+          <p:cNvPr id="6" name="TextBox 5">
+            <a:extLst>
+              <a:ext uri="{FF2B5EF4-FFF2-40B4-BE49-F238E27FC236}">
+                <a16:creationId xmlns:a16="http://schemas.microsoft.com/office/drawing/2014/main" id="{5F2CA489-50F3-F5CA-A881-E256D182A48B}"/>
+              </a:ext>
+            </a:extLst>
+          </p:cNvPr>
+          <p:cNvSpPr txBox="1"/>
+          <p:nvPr/>
+        </p:nvSpPr>
+        <p:spPr>
+          <a:xfrm>
+            <a:off x="5742432" y="441174"/>
+            <a:ext cx="6711696" cy="2246769"/>
+          </a:xfrm>
+          <a:prstGeom prst="rect">
+            <a:avLst/>
+          </a:prstGeom>
+          <a:noFill/>
+        </p:spPr>
+        <p:txBody>
+          <a:bodyPr wrap="square">
+            <a:spAutoFit/>
+          </a:bodyPr>
+          <a:lstStyle/>
+          <a:p>
+            <a:r>
+              <a:rPr lang="en-US" sz="2000" b="1" dirty="0">
+                <a:solidFill>
+                  <a:schemeClr val="accent6">
+                    <a:lumMod val="60000"/>
+                    <a:lumOff val="40000"/>
+                  </a:schemeClr>
+                </a:solidFill>
+              </a:rPr>
+              <a:t>Agent Responsibilities</a:t>
+            </a:r>
+          </a:p>
+          <a:p>
+            <a:pPr marL="342900" indent="-342900">
+              <a:buFont typeface="Arial" panose="020B0604020202020204" pitchFamily="34" charset="0"/>
+              <a:buChar char="•"/>
+            </a:pPr>
+            <a:r>
+              <a:rPr lang="en-US" sz="2000" b="1" dirty="0">
+                <a:solidFill>
+                  <a:schemeClr val="accent6">
+                    <a:lumMod val="60000"/>
+                    <a:lumOff val="40000"/>
+                  </a:schemeClr>
+                </a:solidFill>
+              </a:rPr>
+              <a:t>Document Agent: </a:t>
+            </a:r>
+            <a:r>
+              <a:rPr lang="en-US" sz="2000" dirty="0">
+                <a:solidFill>
+                  <a:schemeClr val="accent6">
+                    <a:lumMod val="60000"/>
+                    <a:lumOff val="40000"/>
+                  </a:schemeClr>
+                </a:solidFill>
+              </a:rPr>
+              <a:t>Understands document structure and finds sections </a:t>
+            </a:r>
+          </a:p>
+          <a:p>
+            <a:pPr marL="342900" indent="-342900">
+              <a:buFont typeface="Arial" panose="020B0604020202020204" pitchFamily="34" charset="0"/>
+              <a:buChar char="•"/>
+            </a:pPr>
+            <a:r>
+              <a:rPr lang="en-US" sz="2000" b="1" dirty="0">
+                <a:solidFill>
+                  <a:schemeClr val="accent6">
+                    <a:lumMod val="60000"/>
+                    <a:lumOff val="40000"/>
+                  </a:schemeClr>
+                </a:solidFill>
+              </a:rPr>
+              <a:t>Retriever Agent: </a:t>
+            </a:r>
+            <a:r>
+              <a:rPr lang="en-US" sz="2000" dirty="0">
+                <a:solidFill>
+                  <a:schemeClr val="accent6">
+                    <a:lumMod val="60000"/>
+                    <a:lumOff val="40000"/>
+                  </a:schemeClr>
+                </a:solidFill>
+              </a:rPr>
+              <a:t>Retrieves relevant content </a:t>
+            </a:r>
+          </a:p>
+          <a:p>
+            <a:pPr marL="342900" indent="-342900">
+              <a:buFont typeface="Arial" panose="020B0604020202020204" pitchFamily="34" charset="0"/>
+              <a:buChar char="•"/>
+            </a:pPr>
+            <a:r>
+              <a:rPr lang="en-US" sz="2000" b="1" dirty="0">
+                <a:solidFill>
+                  <a:schemeClr val="accent6">
+                    <a:lumMod val="60000"/>
+                    <a:lumOff val="40000"/>
+                  </a:schemeClr>
+                </a:solidFill>
+              </a:rPr>
+              <a:t>Reasoning Agent: </a:t>
+            </a:r>
+            <a:r>
+              <a:rPr lang="en-US" sz="2000" dirty="0">
+                <a:solidFill>
+                  <a:schemeClr val="accent6">
+                    <a:lumMod val="60000"/>
+                    <a:lumOff val="40000"/>
+                  </a:schemeClr>
+                </a:solidFill>
+              </a:rPr>
+              <a:t>Synthesizes evidence and Resolves contradictions </a:t>
+            </a:r>
+          </a:p>
+          <a:p>
+            <a:pPr marL="342900" indent="-342900">
+              <a:buFont typeface="Arial" panose="020B0604020202020204" pitchFamily="34" charset="0"/>
+              <a:buChar char="•"/>
+            </a:pPr>
+            <a:r>
+              <a:rPr lang="en-US" sz="2000" b="1" dirty="0">
+                <a:solidFill>
+                  <a:schemeClr val="accent6">
+                    <a:lumMod val="60000"/>
+                    <a:lumOff val="40000"/>
+                  </a:schemeClr>
+                </a:solidFill>
+              </a:rPr>
+              <a:t>Answer Agent: </a:t>
+            </a:r>
+            <a:r>
+              <a:rPr lang="en-US" sz="2000" dirty="0">
+                <a:solidFill>
+                  <a:schemeClr val="accent6">
+                    <a:lumMod val="60000"/>
+                    <a:lumOff val="40000"/>
+                  </a:schemeClr>
+                </a:solidFill>
+              </a:rPr>
+              <a:t>Creates final response</a:t>
+            </a:r>
+          </a:p>
+        </p:txBody>
+      </p:sp>
+      <p:sp>
+        <p:nvSpPr>
+          <p:cNvPr id="3" name="TextBox 2">
+            <a:extLst>
+              <a:ext uri="{FF2B5EF4-FFF2-40B4-BE49-F238E27FC236}">
+                <a16:creationId xmlns:a16="http://schemas.microsoft.com/office/drawing/2014/main" id="{70BCC52F-885C-0153-AC9F-F7E494A0D45A}"/>
+              </a:ext>
+            </a:extLst>
+          </p:cNvPr>
+          <p:cNvSpPr txBox="1"/>
+          <p:nvPr/>
+        </p:nvSpPr>
+        <p:spPr>
+          <a:xfrm>
+            <a:off x="5923788" y="3054096"/>
+            <a:ext cx="6268212" cy="3477875"/>
+          </a:xfrm>
+          <a:prstGeom prst="rect">
+            <a:avLst/>
+          </a:prstGeom>
+          <a:noFill/>
+        </p:spPr>
+        <p:txBody>
+          <a:bodyPr wrap="square">
+            <a:spAutoFit/>
+          </a:bodyPr>
+          <a:lstStyle/>
+          <a:p>
+            <a:pPr>
+              <a:buNone/>
+            </a:pPr>
+            <a:r>
+              <a:rPr lang="en-US" sz="2000" b="1" dirty="0">
+                <a:solidFill>
+                  <a:schemeClr val="accent6">
+                    <a:lumMod val="60000"/>
+                    <a:lumOff val="40000"/>
+                  </a:schemeClr>
+                </a:solidFill>
+              </a:rPr>
+              <a:t>Advantages</a:t>
+            </a:r>
+          </a:p>
+          <a:p>
+            <a:pPr>
+              <a:buNone/>
+            </a:pPr>
+            <a:r>
+              <a:rPr lang="en-US" sz="2000" dirty="0">
+                <a:solidFill>
+                  <a:schemeClr val="accent6">
+                    <a:lumMod val="60000"/>
+                    <a:lumOff val="40000"/>
+                  </a:schemeClr>
+                </a:solidFill>
+              </a:rPr>
+              <a:t>✅ Highest accuracy</a:t>
+            </a:r>
+          </a:p>
+          <a:p>
+            <a:pPr>
+              <a:buNone/>
+            </a:pPr>
+            <a:r>
+              <a:rPr lang="en-US" sz="2000" dirty="0">
+                <a:solidFill>
+                  <a:schemeClr val="accent6">
+                    <a:lumMod val="60000"/>
+                    <a:lumOff val="40000"/>
+                  </a:schemeClr>
+                </a:solidFill>
+              </a:rPr>
+              <a:t>✅ Better reasoning</a:t>
+            </a:r>
+          </a:p>
+          <a:p>
+            <a:pPr>
+              <a:buNone/>
+            </a:pPr>
+            <a:r>
+              <a:rPr lang="en-US" sz="2000" dirty="0">
+                <a:solidFill>
+                  <a:schemeClr val="accent6">
+                    <a:lumMod val="60000"/>
+                    <a:lumOff val="40000"/>
+                  </a:schemeClr>
+                </a:solidFill>
+              </a:rPr>
+              <a:t>✅ Handles complex questions</a:t>
+            </a:r>
+          </a:p>
+          <a:p>
+            <a:pPr>
+              <a:buNone/>
+            </a:pPr>
+            <a:r>
+              <a:rPr lang="en-US" sz="2000" dirty="0">
+                <a:solidFill>
+                  <a:schemeClr val="accent6">
+                    <a:lumMod val="60000"/>
+                    <a:lumOff val="40000"/>
+                  </a:schemeClr>
+                </a:solidFill>
+              </a:rPr>
+              <a:t>✅ Easier to extend</a:t>
+            </a:r>
+          </a:p>
+          <a:p>
+            <a:pPr>
+              <a:buNone/>
+            </a:pPr>
+            <a:endParaRPr lang="en-US" sz="2000" b="1" dirty="0">
+              <a:solidFill>
+                <a:schemeClr val="accent6">
+                  <a:lumMod val="60000"/>
+                  <a:lumOff val="40000"/>
+                </a:schemeClr>
+              </a:solidFill>
+            </a:endParaRPr>
+          </a:p>
+          <a:p>
+            <a:pPr>
+              <a:buNone/>
+            </a:pPr>
+            <a:r>
+              <a:rPr lang="en-US" sz="2000" b="1" dirty="0">
+                <a:solidFill>
+                  <a:schemeClr val="accent6">
+                    <a:lumMod val="60000"/>
+                    <a:lumOff val="40000"/>
+                  </a:schemeClr>
+                </a:solidFill>
+              </a:rPr>
+              <a:t>Limitations</a:t>
+            </a:r>
+          </a:p>
+          <a:p>
+            <a:pPr>
+              <a:buNone/>
+            </a:pPr>
+            <a:r>
+              <a:rPr lang="en-US" sz="2000" dirty="0">
+                <a:solidFill>
+                  <a:schemeClr val="accent6">
+                    <a:lumMod val="60000"/>
+                    <a:lumOff val="40000"/>
+                  </a:schemeClr>
+                </a:solidFill>
+              </a:rPr>
+              <a:t>❌ Most expensive</a:t>
+            </a:r>
+          </a:p>
+          <a:p>
+            <a:pPr>
+              <a:buNone/>
+            </a:pPr>
+            <a:r>
+              <a:rPr lang="en-US" sz="2000" dirty="0">
+                <a:solidFill>
+                  <a:schemeClr val="accent6">
+                    <a:lumMod val="60000"/>
+                    <a:lumOff val="40000"/>
+                  </a:schemeClr>
+                </a:solidFill>
+              </a:rPr>
+              <a:t>❌ Higher latency</a:t>
+            </a:r>
+          </a:p>
+          <a:p>
+            <a:pPr>
+              <a:buNone/>
+            </a:pPr>
+            <a:r>
+              <a:rPr lang="en-US" sz="2000" dirty="0">
+                <a:solidFill>
+                  <a:schemeClr val="accent6">
+                    <a:lumMod val="60000"/>
+                    <a:lumOff val="40000"/>
+                  </a:schemeClr>
+                </a:solidFill>
+              </a:rPr>
+              <a:t>❌ More engineering effort</a:t>
+            </a:r>
+          </a:p>
+          <a:p>
+            <a:pPr>
+              <a:buNone/>
+            </a:pPr>
+            <a:r>
+              <a:rPr lang="en-US" sz="2000" dirty="0">
+                <a:solidFill>
+                  <a:schemeClr val="accent6">
+                    <a:lumMod val="60000"/>
+                    <a:lumOff val="40000"/>
+                  </a:schemeClr>
+                </a:solidFill>
+              </a:rPr>
+              <a:t>❌ More infrastructure to maintain</a:t>
+            </a:r>
+          </a:p>
+        </p:txBody>
+      </p:sp>
+    </p:spTree>
+    <p:extLst>
+      <p:ext uri="{BB962C8B-B14F-4D97-AF65-F5344CB8AC3E}">
+        <p14:creationId xmlns:p14="http://schemas.microsoft.com/office/powerpoint/2010/main" val="1493802874"/>
+      </p:ext>
+    </p:extLst>
+  </p:cSld>
+  <p:clrMapOvr>
+    <a:masterClrMapping/>
+  </p:clrMapOvr>
+</p:sld>
+</file>
+
+<file path=ppt/slides/slide11.xml><?xml version="1.0" encoding="utf-8"?>
+<p:sld xmlns:a="http://schemas.openxmlformats.org/drawingml/2006/main" xmlns:r="http://schemas.openxmlformats.org/officeDocument/2006/relationships" xmlns:p="http://schemas.openxmlformats.org/presentationml/2006/main">
+  <p:cSld>
+    <p:spTree>
+      <p:nvGrpSpPr>
+        <p:cNvPr id="1" name="">
+          <a:extLst>
+            <a:ext uri="{FF2B5EF4-FFF2-40B4-BE49-F238E27FC236}">
+              <a16:creationId xmlns:a16="http://schemas.microsoft.com/office/drawing/2014/main" id="{9AF8DE3D-BD4D-B02E-6934-4653680E6DD2}"/>
+            </a:ext>
+          </a:extLst>
+        </p:cNvPr>
+        <p:cNvGrpSpPr/>
+        <p:nvPr/>
+      </p:nvGrpSpPr>
+      <p:grpSpPr>
+        <a:xfrm>
+          <a:off x="0" y="0"/>
+          <a:ext cx="0" cy="0"/>
+          <a:chOff x="0" y="0"/>
+          <a:chExt cx="0" cy="0"/>
+        </a:xfrm>
+      </p:grpSpPr>
+      <p:sp>
+        <p:nvSpPr>
+          <p:cNvPr id="4" name="TextBox 3">
+            <a:extLst>
+              <a:ext uri="{FF2B5EF4-FFF2-40B4-BE49-F238E27FC236}">
+                <a16:creationId xmlns:a16="http://schemas.microsoft.com/office/drawing/2014/main" id="{7CE65304-65B1-B40D-918A-D9D334B858D6}"/>
+              </a:ext>
+            </a:extLst>
+          </p:cNvPr>
+          <p:cNvSpPr txBox="1"/>
+          <p:nvPr/>
+        </p:nvSpPr>
+        <p:spPr>
+          <a:xfrm>
+            <a:off x="594360" y="962098"/>
+            <a:ext cx="10780776" cy="3046988"/>
+          </a:xfrm>
+          <a:prstGeom prst="rect">
+            <a:avLst/>
+          </a:prstGeom>
+          <a:noFill/>
+        </p:spPr>
+        <p:txBody>
+          <a:bodyPr wrap="square">
+            <a:spAutoFit/>
+          </a:bodyPr>
+          <a:lstStyle/>
+          <a:p>
+            <a:r>
+              <a:rPr lang="en-US" sz="2400" b="1" dirty="0">
+                <a:solidFill>
+                  <a:schemeClr val="accent6">
+                    <a:lumMod val="60000"/>
+                    <a:lumOff val="40000"/>
+                  </a:schemeClr>
+                </a:solidFill>
+              </a:rPr>
+              <a:t>When to Use Tree of Thoughts</a:t>
+            </a:r>
+          </a:p>
+          <a:p>
+            <a:endParaRPr lang="en-US" sz="2400" dirty="0">
+              <a:solidFill>
+                <a:schemeClr val="accent6">
+                  <a:lumMod val="60000"/>
+                  <a:lumOff val="40000"/>
+                </a:schemeClr>
+              </a:solidFill>
+            </a:endParaRPr>
+          </a:p>
+          <a:p>
+            <a:r>
+              <a:rPr lang="en-US" sz="2400" dirty="0">
+                <a:solidFill>
+                  <a:schemeClr val="accent6">
+                    <a:lumMod val="60000"/>
+                    <a:lumOff val="40000"/>
+                  </a:schemeClr>
+                </a:solidFill>
+              </a:rPr>
+              <a:t>Tree of Thoughts is useful when:</a:t>
+            </a:r>
+          </a:p>
+          <a:p>
+            <a:pPr marL="342900" lvl="0" indent="-342900">
+              <a:buFont typeface="Arial" panose="020B0604020202020204" pitchFamily="34" charset="0"/>
+              <a:buChar char="•"/>
+            </a:pPr>
+            <a:r>
+              <a:rPr lang="en-US" sz="2400" dirty="0">
+                <a:solidFill>
+                  <a:schemeClr val="accent6">
+                    <a:lumMod val="60000"/>
+                    <a:lumOff val="40000"/>
+                  </a:schemeClr>
+                </a:solidFill>
+              </a:rPr>
+              <a:t>Making strategic decisions</a:t>
+            </a:r>
+          </a:p>
+          <a:p>
+            <a:pPr marL="342900" lvl="0" indent="-342900">
+              <a:buFont typeface="Arial" panose="020B0604020202020204" pitchFamily="34" charset="0"/>
+              <a:buChar char="•"/>
+            </a:pPr>
+            <a:r>
+              <a:rPr lang="en-US" sz="2400" dirty="0">
+                <a:solidFill>
+                  <a:schemeClr val="accent6">
+                    <a:lumMod val="60000"/>
+                    <a:lumOff val="40000"/>
+                  </a:schemeClr>
+                </a:solidFill>
+              </a:rPr>
+              <a:t>Brainstorming creative solutions</a:t>
+            </a:r>
+          </a:p>
+          <a:p>
+            <a:pPr marL="342900" lvl="0" indent="-342900">
+              <a:buFont typeface="Arial" panose="020B0604020202020204" pitchFamily="34" charset="0"/>
+              <a:buChar char="•"/>
+            </a:pPr>
+            <a:r>
+              <a:rPr lang="en-US" sz="2400" dirty="0">
+                <a:solidFill>
+                  <a:schemeClr val="accent6">
+                    <a:lumMod val="60000"/>
+                    <a:lumOff val="40000"/>
+                  </a:schemeClr>
+                </a:solidFill>
+              </a:rPr>
+              <a:t>Solving complex business or technical problems</a:t>
+            </a:r>
+          </a:p>
+          <a:p>
+            <a:pPr marL="342900" lvl="0" indent="-342900">
+              <a:buFont typeface="Arial" panose="020B0604020202020204" pitchFamily="34" charset="0"/>
+              <a:buChar char="•"/>
+            </a:pPr>
+            <a:r>
+              <a:rPr lang="en-US" sz="2400" dirty="0">
+                <a:solidFill>
+                  <a:schemeClr val="accent6">
+                    <a:lumMod val="60000"/>
+                    <a:lumOff val="40000"/>
+                  </a:schemeClr>
+                </a:solidFill>
+              </a:rPr>
+              <a:t>Evaluating multiple alternatives</a:t>
+            </a:r>
+          </a:p>
+          <a:p>
+            <a:pPr marL="342900" lvl="0" indent="-342900">
+              <a:buFont typeface="Arial" panose="020B0604020202020204" pitchFamily="34" charset="0"/>
+              <a:buChar char="•"/>
+            </a:pPr>
+            <a:r>
+              <a:rPr lang="en-US" sz="2400" dirty="0">
+                <a:solidFill>
+                  <a:schemeClr val="accent6">
+                    <a:lumMod val="60000"/>
+                    <a:lumOff val="40000"/>
+                  </a:schemeClr>
+                </a:solidFill>
+              </a:rPr>
+              <a:t>Planning projects</a:t>
+            </a:r>
+          </a:p>
+        </p:txBody>
+      </p:sp>
+    </p:spTree>
+    <p:extLst>
+      <p:ext uri="{BB962C8B-B14F-4D97-AF65-F5344CB8AC3E}">
+        <p14:creationId xmlns:p14="http://schemas.microsoft.com/office/powerpoint/2010/main" val="3571308101"/>
+      </p:ext>
+    </p:extLst>
+  </p:cSld>
+  <p:clrMapOvr>
+    <a:masterClrMapping/>
+  </p:clrMapOvr>
+</p:sld>
+</file>
+
+<file path=ppt/slides/slide12.xml><?xml version="1.0" encoding="utf-8"?>
+<p:sld xmlns:a="http://schemas.openxmlformats.org/drawingml/2006/main" xmlns:r="http://schemas.openxmlformats.org/officeDocument/2006/relationships" xmlns:p="http://schemas.openxmlformats.org/presentationml/2006/main">
+  <p:cSld>
+    <p:spTree>
+      <p:nvGrpSpPr>
+        <p:cNvPr id="1" name="">
+          <a:extLst>
+            <a:ext uri="{FF2B5EF4-FFF2-40B4-BE49-F238E27FC236}">
+              <a16:creationId xmlns:a16="http://schemas.microsoft.com/office/drawing/2014/main" id="{5A151B52-7056-10DF-A6C3-BCC15C9176A0}"/>
+            </a:ext>
+          </a:extLst>
+        </p:cNvPr>
+        <p:cNvGrpSpPr/>
+        <p:nvPr/>
+      </p:nvGrpSpPr>
+      <p:grpSpPr>
+        <a:xfrm>
+          <a:off x="0" y="0"/>
+          <a:ext cx="0" cy="0"/>
+          <a:chOff x="0" y="0"/>
+          <a:chExt cx="0" cy="0"/>
+        </a:xfrm>
+      </p:grpSpPr>
+      <p:sp>
+        <p:nvSpPr>
+          <p:cNvPr id="4" name="TextBox 3">
+            <a:extLst>
+              <a:ext uri="{FF2B5EF4-FFF2-40B4-BE49-F238E27FC236}">
+                <a16:creationId xmlns:a16="http://schemas.microsoft.com/office/drawing/2014/main" id="{49E613FD-060E-9BB1-9F8E-690F34778479}"/>
+              </a:ext>
+            </a:extLst>
+          </p:cNvPr>
+          <p:cNvSpPr txBox="1"/>
+          <p:nvPr/>
+        </p:nvSpPr>
+        <p:spPr>
+          <a:xfrm>
+            <a:off x="594360" y="962098"/>
+            <a:ext cx="10780776" cy="3785652"/>
+          </a:xfrm>
+          <a:prstGeom prst="rect">
+            <a:avLst/>
+          </a:prstGeom>
+          <a:noFill/>
+        </p:spPr>
+        <p:txBody>
+          <a:bodyPr wrap="square">
+            <a:spAutoFit/>
+          </a:bodyPr>
+          <a:lstStyle/>
+          <a:p>
+            <a:r>
+              <a:rPr lang="en-US" sz="2400" b="1" dirty="0">
+                <a:solidFill>
+                  <a:schemeClr val="accent6">
+                    <a:lumMod val="60000"/>
+                    <a:lumOff val="40000"/>
+                  </a:schemeClr>
+                </a:solidFill>
+              </a:rPr>
+              <a:t>2. Reflexion – Asking AI to Critique and Improve Its Own Output</a:t>
+            </a:r>
+          </a:p>
+          <a:p>
+            <a:endParaRPr lang="en-US" sz="2400" dirty="0">
+              <a:solidFill>
+                <a:schemeClr val="accent6">
+                  <a:lumMod val="60000"/>
+                  <a:lumOff val="40000"/>
+                </a:schemeClr>
+              </a:solidFill>
+            </a:endParaRPr>
+          </a:p>
+          <a:p>
+            <a:r>
+              <a:rPr lang="en-US" sz="2400" b="1" dirty="0">
+                <a:solidFill>
+                  <a:schemeClr val="accent6">
+                    <a:lumMod val="60000"/>
+                    <a:lumOff val="40000"/>
+                  </a:schemeClr>
+                </a:solidFill>
+              </a:rPr>
+              <a:t>What is Reflexion?</a:t>
+            </a:r>
+          </a:p>
+          <a:p>
+            <a:endParaRPr lang="en-US" sz="2400" dirty="0">
+              <a:solidFill>
+                <a:schemeClr val="accent6">
+                  <a:lumMod val="60000"/>
+                  <a:lumOff val="40000"/>
+                </a:schemeClr>
+              </a:solidFill>
+            </a:endParaRPr>
+          </a:p>
+          <a:p>
+            <a:r>
+              <a:rPr lang="en-US" sz="2400" dirty="0">
+                <a:solidFill>
+                  <a:schemeClr val="accent6">
+                    <a:lumMod val="60000"/>
+                    <a:lumOff val="40000"/>
+                  </a:schemeClr>
+                </a:solidFill>
+              </a:rPr>
+              <a:t>Reflexion is a technique where AI is asked to:</a:t>
+            </a:r>
+          </a:p>
+          <a:p>
+            <a:pPr marL="342900" lvl="0" indent="-342900">
+              <a:buFont typeface="Arial" panose="020B0604020202020204" pitchFamily="34" charset="0"/>
+              <a:buChar char="•"/>
+            </a:pPr>
+            <a:r>
+              <a:rPr lang="en-US" sz="2400" dirty="0">
+                <a:solidFill>
+                  <a:schemeClr val="accent6">
+                    <a:lumMod val="60000"/>
+                    <a:lumOff val="40000"/>
+                  </a:schemeClr>
+                </a:solidFill>
+              </a:rPr>
+              <a:t>Generate an answer</a:t>
+            </a:r>
+          </a:p>
+          <a:p>
+            <a:pPr marL="342900" lvl="0" indent="-342900">
+              <a:buFont typeface="Arial" panose="020B0604020202020204" pitchFamily="34" charset="0"/>
+              <a:buChar char="•"/>
+            </a:pPr>
+            <a:r>
+              <a:rPr lang="en-US" sz="2400" dirty="0">
+                <a:solidFill>
+                  <a:schemeClr val="accent6">
+                    <a:lumMod val="60000"/>
+                    <a:lumOff val="40000"/>
+                  </a:schemeClr>
+                </a:solidFill>
+              </a:rPr>
+              <a:t>Critically analyze its answer</a:t>
+            </a:r>
+          </a:p>
+          <a:p>
+            <a:pPr marL="342900" lvl="0" indent="-342900">
+              <a:buFont typeface="Arial" panose="020B0604020202020204" pitchFamily="34" charset="0"/>
+              <a:buChar char="•"/>
+            </a:pPr>
+            <a:r>
+              <a:rPr lang="en-US" sz="2400" dirty="0">
+                <a:solidFill>
+                  <a:schemeClr val="accent6">
+                    <a:lumMod val="60000"/>
+                    <a:lumOff val="40000"/>
+                  </a:schemeClr>
+                </a:solidFill>
+              </a:rPr>
+              <a:t>Improve or correct its response</a:t>
+            </a:r>
+          </a:p>
+          <a:p>
+            <a:endParaRPr lang="en-US" sz="2400" dirty="0">
+              <a:solidFill>
+                <a:schemeClr val="accent6">
+                  <a:lumMod val="60000"/>
+                  <a:lumOff val="40000"/>
+                </a:schemeClr>
+              </a:solidFill>
+            </a:endParaRPr>
+          </a:p>
+          <a:p>
+            <a:r>
+              <a:rPr lang="en-US" sz="2400" dirty="0">
+                <a:solidFill>
+                  <a:schemeClr val="accent6">
+                    <a:lumMod val="60000"/>
+                    <a:lumOff val="40000"/>
+                  </a:schemeClr>
+                </a:solidFill>
+              </a:rPr>
+              <a:t>This technique helps AI simulate self-review and quality improvement.</a:t>
+            </a:r>
+          </a:p>
+        </p:txBody>
+      </p:sp>
+    </p:spTree>
+    <p:extLst>
+      <p:ext uri="{BB962C8B-B14F-4D97-AF65-F5344CB8AC3E}">
+        <p14:creationId xmlns:p14="http://schemas.microsoft.com/office/powerpoint/2010/main" val="3841657524"/>
+      </p:ext>
+    </p:extLst>
+  </p:cSld>
+  <p:clrMapOvr>
+    <a:masterClrMapping/>
+  </p:clrMapOvr>
+</p:sld>
+</file>
+
+<file path=ppt/slides/slide13.xml><?xml version="1.0" encoding="utf-8"?>
+<p:sld xmlns:a="http://schemas.openxmlformats.org/drawingml/2006/main" xmlns:r="http://schemas.openxmlformats.org/officeDocument/2006/relationships" xmlns:p="http://schemas.openxmlformats.org/presentationml/2006/main">
+  <p:cSld>
+    <p:spTree>
+      <p:nvGrpSpPr>
+        <p:cNvPr id="1" name="">
+          <a:extLst>
+            <a:ext uri="{FF2B5EF4-FFF2-40B4-BE49-F238E27FC236}">
+              <a16:creationId xmlns:a16="http://schemas.microsoft.com/office/drawing/2014/main" id="{99756AD4-5FB2-D1D3-FCD5-4DF1BEF3D2A6}"/>
+            </a:ext>
+          </a:extLst>
+        </p:cNvPr>
+        <p:cNvGrpSpPr/>
+        <p:nvPr/>
+      </p:nvGrpSpPr>
+      <p:grpSpPr>
+        <a:xfrm>
+          <a:off x="0" y="0"/>
+          <a:ext cx="0" cy="0"/>
+          <a:chOff x="0" y="0"/>
+          <a:chExt cx="0" cy="0"/>
+        </a:xfrm>
+      </p:grpSpPr>
+      <p:sp>
+        <p:nvSpPr>
+          <p:cNvPr id="4" name="TextBox 3">
+            <a:extLst>
+              <a:ext uri="{FF2B5EF4-FFF2-40B4-BE49-F238E27FC236}">
+                <a16:creationId xmlns:a16="http://schemas.microsoft.com/office/drawing/2014/main" id="{6729781D-9EE0-DEB0-55AD-8492AA6D98B1}"/>
+              </a:ext>
+            </a:extLst>
+          </p:cNvPr>
+          <p:cNvSpPr txBox="1"/>
+          <p:nvPr/>
+        </p:nvSpPr>
+        <p:spPr>
+          <a:xfrm>
+            <a:off x="594360" y="962098"/>
+            <a:ext cx="10780776" cy="2677656"/>
+          </a:xfrm>
+          <a:prstGeom prst="rect">
+            <a:avLst/>
+          </a:prstGeom>
+          <a:noFill/>
+        </p:spPr>
+        <p:txBody>
+          <a:bodyPr wrap="square">
+            <a:spAutoFit/>
+          </a:bodyPr>
+          <a:lstStyle/>
+          <a:p>
+            <a:r>
+              <a:rPr lang="en-US" sz="2400" b="1" dirty="0">
+                <a:solidFill>
+                  <a:schemeClr val="accent6">
+                    <a:lumMod val="60000"/>
+                    <a:lumOff val="40000"/>
+                  </a:schemeClr>
+                </a:solidFill>
+              </a:rPr>
+              <a:t>Example Without Reflexion</a:t>
+            </a:r>
+          </a:p>
+          <a:p>
+            <a:endParaRPr lang="en-US" sz="2400" dirty="0">
+              <a:solidFill>
+                <a:schemeClr val="accent6">
+                  <a:lumMod val="60000"/>
+                  <a:lumOff val="40000"/>
+                </a:schemeClr>
+              </a:solidFill>
+            </a:endParaRPr>
+          </a:p>
+          <a:p>
+            <a:r>
+              <a:rPr lang="en-US" sz="2400" dirty="0">
+                <a:solidFill>
+                  <a:schemeClr val="accent6">
+                    <a:lumMod val="60000"/>
+                    <a:lumOff val="40000"/>
+                  </a:schemeClr>
+                </a:solidFill>
+              </a:rPr>
+              <a:t>Prompt:</a:t>
+            </a:r>
+          </a:p>
+          <a:p>
+            <a:r>
+              <a:rPr lang="en-US" sz="2400" dirty="0">
+                <a:solidFill>
+                  <a:schemeClr val="accent4">
+                    <a:lumMod val="60000"/>
+                    <a:lumOff val="40000"/>
+                  </a:schemeClr>
+                </a:solidFill>
+              </a:rPr>
+              <a:t>Write an email requesting leave.</a:t>
+            </a:r>
+          </a:p>
+          <a:p>
+            <a:endParaRPr lang="en-US" sz="2400" dirty="0">
+              <a:solidFill>
+                <a:schemeClr val="accent6">
+                  <a:lumMod val="60000"/>
+                  <a:lumOff val="40000"/>
+                </a:schemeClr>
+              </a:solidFill>
+            </a:endParaRPr>
+          </a:p>
+          <a:p>
+            <a:endParaRPr lang="en-US" sz="2400" dirty="0">
+              <a:solidFill>
+                <a:schemeClr val="accent6">
+                  <a:lumMod val="60000"/>
+                  <a:lumOff val="40000"/>
+                </a:schemeClr>
+              </a:solidFill>
+            </a:endParaRPr>
+          </a:p>
+          <a:p>
+            <a:r>
+              <a:rPr lang="en-US" sz="2400" dirty="0">
+                <a:solidFill>
+                  <a:schemeClr val="accent6">
+                    <a:lumMod val="60000"/>
+                    <a:lumOff val="40000"/>
+                  </a:schemeClr>
+                </a:solidFill>
+              </a:rPr>
+              <a:t>AI provides one response without quality review.</a:t>
+            </a:r>
+          </a:p>
+        </p:txBody>
+      </p:sp>
+    </p:spTree>
+    <p:extLst>
+      <p:ext uri="{BB962C8B-B14F-4D97-AF65-F5344CB8AC3E}">
+        <p14:creationId xmlns:p14="http://schemas.microsoft.com/office/powerpoint/2010/main" val="3742128469"/>
+      </p:ext>
+    </p:extLst>
+  </p:cSld>
+  <p:clrMapOvr>
+    <a:masterClrMapping/>
+  </p:clrMapOvr>
+</p:sld>
+</file>
+
+<file path=ppt/slides/slide14.xml><?xml version="1.0" encoding="utf-8"?>
+<p:sld xmlns:a="http://schemas.openxmlformats.org/drawingml/2006/main" xmlns:r="http://schemas.openxmlformats.org/officeDocument/2006/relationships" xmlns:p="http://schemas.openxmlformats.org/presentationml/2006/main">
+  <p:cSld>
+    <p:spTree>
+      <p:nvGrpSpPr>
+        <p:cNvPr id="1" name="">
+          <a:extLst>
+            <a:ext uri="{FF2B5EF4-FFF2-40B4-BE49-F238E27FC236}">
+              <a16:creationId xmlns:a16="http://schemas.microsoft.com/office/drawing/2014/main" id="{C5E463A9-2625-55E3-688F-2A075A045994}"/>
+            </a:ext>
+          </a:extLst>
+        </p:cNvPr>
+        <p:cNvGrpSpPr/>
+        <p:nvPr/>
+      </p:nvGrpSpPr>
+      <p:grpSpPr>
+        <a:xfrm>
+          <a:off x="0" y="0"/>
+          <a:ext cx="0" cy="0"/>
+          <a:chOff x="0" y="0"/>
+          <a:chExt cx="0" cy="0"/>
+        </a:xfrm>
+      </p:grpSpPr>
+      <p:sp>
+        <p:nvSpPr>
+          <p:cNvPr id="4" name="TextBox 3">
+            <a:extLst>
+              <a:ext uri="{FF2B5EF4-FFF2-40B4-BE49-F238E27FC236}">
+                <a16:creationId xmlns:a16="http://schemas.microsoft.com/office/drawing/2014/main" id="{3E34F403-E6E2-F064-D91B-F6920C2FA603}"/>
+              </a:ext>
+            </a:extLst>
+          </p:cNvPr>
+          <p:cNvSpPr txBox="1"/>
+          <p:nvPr/>
+        </p:nvSpPr>
+        <p:spPr>
+          <a:xfrm>
+            <a:off x="594360" y="962098"/>
+            <a:ext cx="10780776" cy="4524315"/>
+          </a:xfrm>
+          <a:prstGeom prst="rect">
+            <a:avLst/>
+          </a:prstGeom>
+          <a:noFill/>
+        </p:spPr>
+        <p:txBody>
+          <a:bodyPr wrap="square">
+            <a:spAutoFit/>
+          </a:bodyPr>
+          <a:lstStyle/>
+          <a:p>
+            <a:r>
+              <a:rPr lang="en-US" sz="2400" b="1" dirty="0">
+                <a:solidFill>
+                  <a:schemeClr val="accent6">
+                    <a:lumMod val="60000"/>
+                    <a:lumOff val="40000"/>
+                  </a:schemeClr>
+                </a:solidFill>
+              </a:rPr>
+              <a:t>Example With Reflexion</a:t>
+            </a:r>
+          </a:p>
+          <a:p>
+            <a:endParaRPr lang="en-US" sz="2400" dirty="0">
+              <a:solidFill>
+                <a:schemeClr val="accent6">
+                  <a:lumMod val="60000"/>
+                  <a:lumOff val="40000"/>
+                </a:schemeClr>
+              </a:solidFill>
+            </a:endParaRPr>
+          </a:p>
+          <a:p>
+            <a:r>
+              <a:rPr lang="en-US" sz="2400" dirty="0">
+                <a:solidFill>
+                  <a:schemeClr val="accent6">
+                    <a:lumMod val="60000"/>
+                    <a:lumOff val="40000"/>
+                  </a:schemeClr>
+                </a:solidFill>
+              </a:rPr>
+              <a:t>Prompt:</a:t>
+            </a:r>
+          </a:p>
+          <a:p>
+            <a:r>
+              <a:rPr lang="en-US" sz="2400" dirty="0">
+                <a:solidFill>
+                  <a:schemeClr val="accent4">
+                    <a:lumMod val="60000"/>
+                    <a:lumOff val="40000"/>
+                  </a:schemeClr>
+                </a:solidFill>
+              </a:rPr>
+              <a:t>Write an email requesting leave.</a:t>
+            </a:r>
+          </a:p>
+          <a:p>
+            <a:r>
+              <a:rPr lang="en-US" sz="2400" dirty="0">
+                <a:solidFill>
+                  <a:schemeClr val="accent4">
+                    <a:lumMod val="60000"/>
+                    <a:lumOff val="40000"/>
+                  </a:schemeClr>
+                </a:solidFill>
+              </a:rPr>
+              <a:t> </a:t>
+            </a:r>
+          </a:p>
+          <a:p>
+            <a:r>
+              <a:rPr lang="en-US" sz="2400" dirty="0">
+                <a:solidFill>
+                  <a:schemeClr val="accent4">
+                    <a:lumMod val="60000"/>
+                    <a:lumOff val="40000"/>
+                  </a:schemeClr>
+                </a:solidFill>
+              </a:rPr>
+              <a:t>After writing the email:</a:t>
+            </a:r>
+          </a:p>
+          <a:p>
+            <a:r>
+              <a:rPr lang="en-US" sz="2400" dirty="0">
+                <a:solidFill>
+                  <a:schemeClr val="accent4">
+                    <a:lumMod val="60000"/>
+                    <a:lumOff val="40000"/>
+                  </a:schemeClr>
+                </a:solidFill>
+              </a:rPr>
+              <a:t>1. Review the email for clarity and professionalism.</a:t>
+            </a:r>
+          </a:p>
+          <a:p>
+            <a:r>
+              <a:rPr lang="en-US" sz="2400" dirty="0">
+                <a:solidFill>
+                  <a:schemeClr val="accent4">
+                    <a:lumMod val="60000"/>
+                    <a:lumOff val="40000"/>
+                  </a:schemeClr>
+                </a:solidFill>
+              </a:rPr>
+              <a:t>2. Suggest improvements.</a:t>
+            </a:r>
+          </a:p>
+          <a:p>
+            <a:r>
+              <a:rPr lang="en-US" sz="2400" dirty="0">
+                <a:solidFill>
+                  <a:schemeClr val="accent4">
+                    <a:lumMod val="60000"/>
+                    <a:lumOff val="40000"/>
+                  </a:schemeClr>
+                </a:solidFill>
+              </a:rPr>
+              <a:t>3. Provide a revised version.</a:t>
+            </a:r>
+          </a:p>
+          <a:p>
+            <a:endParaRPr lang="en-US" sz="2400" dirty="0">
+              <a:solidFill>
+                <a:schemeClr val="accent6">
+                  <a:lumMod val="60000"/>
+                  <a:lumOff val="40000"/>
+                </a:schemeClr>
+              </a:solidFill>
+            </a:endParaRPr>
+          </a:p>
+          <a:p>
+            <a:endParaRPr lang="en-US" sz="2400" dirty="0">
+              <a:solidFill>
+                <a:schemeClr val="accent6">
+                  <a:lumMod val="60000"/>
+                  <a:lumOff val="40000"/>
+                </a:schemeClr>
+              </a:solidFill>
+            </a:endParaRPr>
+          </a:p>
+          <a:p>
+            <a:r>
+              <a:rPr lang="en-US" sz="2400" dirty="0">
+                <a:solidFill>
+                  <a:schemeClr val="accent6">
+                    <a:lumMod val="60000"/>
+                    <a:lumOff val="40000"/>
+                  </a:schemeClr>
+                </a:solidFill>
+              </a:rPr>
+              <a:t>This produces higher quality results.</a:t>
+            </a:r>
+          </a:p>
+        </p:txBody>
+      </p:sp>
+    </p:spTree>
+    <p:extLst>
+      <p:ext uri="{BB962C8B-B14F-4D97-AF65-F5344CB8AC3E}">
+        <p14:creationId xmlns:p14="http://schemas.microsoft.com/office/powerpoint/2010/main" val="1924586452"/>
+      </p:ext>
+    </p:extLst>
+  </p:cSld>
+  <p:clrMapOvr>
+    <a:masterClrMapping/>
+  </p:clrMapOvr>
+</p:sld>
+</file>
+
+<file path=ppt/slides/slide15.xml><?xml version="1.0" encoding="utf-8"?>
+<p:sld xmlns:a="http://schemas.openxmlformats.org/drawingml/2006/main" xmlns:r="http://schemas.openxmlformats.org/officeDocument/2006/relationships" xmlns:p="http://schemas.openxmlformats.org/presentationml/2006/main">
+  <p:cSld>
+    <p:spTree>
+      <p:nvGrpSpPr>
+        <p:cNvPr id="1" name="">
+          <a:extLst>
+            <a:ext uri="{FF2B5EF4-FFF2-40B4-BE49-F238E27FC236}">
+              <a16:creationId xmlns:a16="http://schemas.microsoft.com/office/drawing/2014/main" id="{3ACA13FA-1786-D429-BA05-3558AC573E3F}"/>
+            </a:ext>
+          </a:extLst>
+        </p:cNvPr>
+        <p:cNvGrpSpPr/>
+        <p:nvPr/>
+      </p:nvGrpSpPr>
+      <p:grpSpPr>
+        <a:xfrm>
+          <a:off x="0" y="0"/>
+          <a:ext cx="0" cy="0"/>
+          <a:chOff x="0" y="0"/>
+          <a:chExt cx="0" cy="0"/>
+        </a:xfrm>
+      </p:grpSpPr>
+      <p:sp>
+        <p:nvSpPr>
+          <p:cNvPr id="4" name="TextBox 3">
+            <a:extLst>
+              <a:ext uri="{FF2B5EF4-FFF2-40B4-BE49-F238E27FC236}">
+                <a16:creationId xmlns:a16="http://schemas.microsoft.com/office/drawing/2014/main" id="{4403FB27-8A7A-B0AC-D783-939BCC710AD6}"/>
+              </a:ext>
+            </a:extLst>
+          </p:cNvPr>
+          <p:cNvSpPr txBox="1"/>
+          <p:nvPr/>
+        </p:nvSpPr>
+        <p:spPr>
+          <a:xfrm>
+            <a:off x="594360" y="962098"/>
+            <a:ext cx="10780776" cy="3416320"/>
+          </a:xfrm>
+          <a:prstGeom prst="rect">
+            <a:avLst/>
+          </a:prstGeom>
+          <a:noFill/>
+        </p:spPr>
+        <p:txBody>
+          <a:bodyPr wrap="square">
+            <a:spAutoFit/>
+          </a:bodyPr>
+          <a:lstStyle/>
+          <a:p>
+            <a:r>
+              <a:rPr lang="en-US" sz="2400" b="1" dirty="0">
+                <a:solidFill>
+                  <a:schemeClr val="accent6">
+                    <a:lumMod val="60000"/>
+                    <a:lumOff val="40000"/>
+                  </a:schemeClr>
+                </a:solidFill>
+              </a:rPr>
+              <a:t>When to Use Reflexion</a:t>
+            </a:r>
+          </a:p>
+          <a:p>
+            <a:endParaRPr lang="en-US" sz="2400" dirty="0">
+              <a:solidFill>
+                <a:schemeClr val="accent6">
+                  <a:lumMod val="60000"/>
+                  <a:lumOff val="40000"/>
+                </a:schemeClr>
+              </a:solidFill>
+            </a:endParaRPr>
+          </a:p>
+          <a:p>
+            <a:r>
+              <a:rPr lang="en-US" sz="2400" dirty="0">
+                <a:solidFill>
+                  <a:schemeClr val="accent6">
+                    <a:lumMod val="60000"/>
+                    <a:lumOff val="40000"/>
+                  </a:schemeClr>
+                </a:solidFill>
+              </a:rPr>
+              <a:t>Reflexion is particularly useful for:</a:t>
+            </a:r>
+          </a:p>
+          <a:p>
+            <a:pPr marL="342900" lvl="0" indent="-342900">
+              <a:buFont typeface="Arial" panose="020B0604020202020204" pitchFamily="34" charset="0"/>
+              <a:buChar char="•"/>
+            </a:pPr>
+            <a:r>
+              <a:rPr lang="en-US" sz="2400" dirty="0">
+                <a:solidFill>
+                  <a:schemeClr val="accent6">
+                    <a:lumMod val="60000"/>
+                    <a:lumOff val="40000"/>
+                  </a:schemeClr>
+                </a:solidFill>
+              </a:rPr>
+              <a:t>Writing tasks</a:t>
+            </a:r>
+          </a:p>
+          <a:p>
+            <a:pPr marL="342900" lvl="0" indent="-342900">
+              <a:buFont typeface="Arial" panose="020B0604020202020204" pitchFamily="34" charset="0"/>
+              <a:buChar char="•"/>
+            </a:pPr>
+            <a:r>
+              <a:rPr lang="en-US" sz="2400" dirty="0">
+                <a:solidFill>
+                  <a:schemeClr val="accent6">
+                    <a:lumMod val="60000"/>
+                    <a:lumOff val="40000"/>
+                  </a:schemeClr>
+                </a:solidFill>
+              </a:rPr>
+              <a:t>Coding improvement</a:t>
+            </a:r>
+          </a:p>
+          <a:p>
+            <a:pPr marL="342900" lvl="0" indent="-342900">
+              <a:buFont typeface="Arial" panose="020B0604020202020204" pitchFamily="34" charset="0"/>
+              <a:buChar char="•"/>
+            </a:pPr>
+            <a:r>
+              <a:rPr lang="en-US" sz="2400" dirty="0">
+                <a:solidFill>
+                  <a:schemeClr val="accent6">
+                    <a:lumMod val="60000"/>
+                    <a:lumOff val="40000"/>
+                  </a:schemeClr>
+                </a:solidFill>
+              </a:rPr>
+              <a:t>Research summaries</a:t>
+            </a:r>
+          </a:p>
+          <a:p>
+            <a:pPr marL="342900" lvl="0" indent="-342900">
+              <a:buFont typeface="Arial" panose="020B0604020202020204" pitchFamily="34" charset="0"/>
+              <a:buChar char="•"/>
+            </a:pPr>
+            <a:r>
+              <a:rPr lang="en-US" sz="2400" dirty="0">
+                <a:solidFill>
+                  <a:schemeClr val="accent6">
+                    <a:lumMod val="60000"/>
+                    <a:lumOff val="40000"/>
+                  </a:schemeClr>
+                </a:solidFill>
+              </a:rPr>
+              <a:t>Report generation</a:t>
+            </a:r>
+          </a:p>
+          <a:p>
+            <a:pPr marL="342900" lvl="0" indent="-342900">
+              <a:buFont typeface="Arial" panose="020B0604020202020204" pitchFamily="34" charset="0"/>
+              <a:buChar char="•"/>
+            </a:pPr>
+            <a:r>
+              <a:rPr lang="en-US" sz="2400" dirty="0">
+                <a:solidFill>
+                  <a:schemeClr val="accent6">
+                    <a:lumMod val="60000"/>
+                    <a:lumOff val="40000"/>
+                  </a:schemeClr>
+                </a:solidFill>
+              </a:rPr>
+              <a:t>Professional communication</a:t>
+            </a:r>
+          </a:p>
+          <a:p>
+            <a:pPr marL="342900" lvl="0" indent="-342900">
+              <a:buFont typeface="Arial" panose="020B0604020202020204" pitchFamily="34" charset="0"/>
+              <a:buChar char="•"/>
+            </a:pPr>
+            <a:endParaRPr lang="en-US" sz="2400" dirty="0">
+              <a:solidFill>
+                <a:schemeClr val="accent6">
+                  <a:lumMod val="60000"/>
+                  <a:lumOff val="40000"/>
+                </a:schemeClr>
+              </a:solidFill>
+            </a:endParaRPr>
+          </a:p>
+        </p:txBody>
+      </p:sp>
+    </p:spTree>
+    <p:extLst>
+      <p:ext uri="{BB962C8B-B14F-4D97-AF65-F5344CB8AC3E}">
+        <p14:creationId xmlns:p14="http://schemas.microsoft.com/office/powerpoint/2010/main" val="2730046639"/>
+      </p:ext>
+    </p:extLst>
+  </p:cSld>
+  <p:clrMapOvr>
+    <a:masterClrMapping/>
+  </p:clrMapOvr>
+</p:sld>
+</file>
+
+<file path=ppt/slides/slide16.xml><?xml version="1.0" encoding="utf-8"?>
 <p:sld xmlns:a="http://schemas.openxmlformats.org/drawingml/2006/main" xmlns:r="http://schemas.openxmlformats.org/officeDocument/2006/relationships" xmlns:p="http://schemas.openxmlformats.org/presentationml/2006/main">
   <p:cSld>
     <p:spTree>
@@ -4034,7 +5720,7 @@
 </p:sld>
 </file>
 
-<file path=ppt/slides/slide11.xml><?xml version="1.0" encoding="utf-8"?>
+<file path=ppt/slides/slide17.xml><?xml version="1.0" encoding="utf-8"?>
 <p:sld xmlns:a="http://schemas.openxmlformats.org/drawingml/2006/main" xmlns:r="http://schemas.openxmlformats.org/officeDocument/2006/relationships" xmlns:p="http://schemas.openxmlformats.org/presentationml/2006/main">
   <p:cSld>
     <p:spTree>
@@ -4230,7 +5916,7 @@
 </p:sld>
 </file>
 
-<file path=ppt/slides/slide12.xml><?xml version="1.0" encoding="utf-8"?>
+<file path=ppt/slides/slide18.xml><?xml version="1.0" encoding="utf-8"?>
 <p:sld xmlns:a="http://schemas.openxmlformats.org/drawingml/2006/main" xmlns:r="http://schemas.openxmlformats.org/officeDocument/2006/relationships" xmlns:p="http://schemas.openxmlformats.org/presentationml/2006/main">
   <p:cSld>
     <p:spTree>
@@ -4451,7 +6137,7 @@
 </p:sld>
 </file>
 
-<file path=ppt/slides/slide13.xml><?xml version="1.0" encoding="utf-8"?>
+<file path=ppt/slides/slide19.xml><?xml version="1.0" encoding="utf-8"?>
 <p:sld xmlns:a="http://schemas.openxmlformats.org/drawingml/2006/main" xmlns:r="http://schemas.openxmlformats.org/officeDocument/2006/relationships" xmlns:p="http://schemas.openxmlformats.org/presentationml/2006/main">
   <p:cSld>
     <p:spTree>
@@ -4645,7 +6331,43 @@
 </p:sld>
 </file>
 
-<file path=ppt/slides/slide14.xml><?xml version="1.0" encoding="utf-8"?>
+<file path=ppt/slides/slide2.xml><?xml version="1.0" encoding="utf-8"?>
+<p:sld xmlns:a="http://schemas.openxmlformats.org/drawingml/2006/main" xmlns:r="http://schemas.openxmlformats.org/officeDocument/2006/relationships" xmlns:p="http://schemas.openxmlformats.org/presentationml/2006/main">
+  <p:cSld>
+    <p:spTree>
+      <p:nvGrpSpPr>
+        <p:cNvPr id="1" name="">
+          <a:extLst>
+            <a:ext uri="{FF2B5EF4-FFF2-40B4-BE49-F238E27FC236}">
+              <a16:creationId xmlns:a16="http://schemas.microsoft.com/office/drawing/2014/main" id="{C0DC4EE4-7CB9-DC2F-6583-CEFEBED4EA2E}"/>
+            </a:ext>
+          </a:extLst>
+        </p:cNvPr>
+        <p:cNvGrpSpPr/>
+        <p:nvPr/>
+      </p:nvGrpSpPr>
+      <p:grpSpPr>
+        <a:xfrm>
+          <a:off x="0" y="0"/>
+          <a:ext cx="0" cy="0"/>
+          <a:chOff x="0" y="0"/>
+          <a:chExt cx="0" cy="0"/>
+        </a:xfrm>
+      </p:grpSpPr>
+    </p:spTree>
+    <p:extLst>
+      <p:ext uri="{BB962C8B-B14F-4D97-AF65-F5344CB8AC3E}">
+        <p14:creationId xmlns:p14="http://schemas.microsoft.com/office/powerpoint/2010/main" val="3227882609"/>
+      </p:ext>
+    </p:extLst>
+  </p:cSld>
+  <p:clrMapOvr>
+    <a:masterClrMapping/>
+  </p:clrMapOvr>
+</p:sld>
+</file>
+
+<file path=ppt/slides/slide20.xml><?xml version="1.0" encoding="utf-8"?>
 <p:sld xmlns:a="http://schemas.openxmlformats.org/drawingml/2006/main" xmlns:r="http://schemas.openxmlformats.org/officeDocument/2006/relationships" xmlns:p="http://schemas.openxmlformats.org/presentationml/2006/main">
   <p:cSld>
     <p:spTree>
@@ -4913,17 +6635,6 @@
               <a:buChar char="•"/>
             </a:pPr>
             <a:r>
-              <a:rPr lang="en-US" sz="2000" dirty="0" err="1">
-                <a:solidFill>
-                  <a:schemeClr val="accent6">
-                    <a:lumMod val="60000"/>
-                    <a:lumOff val="40000"/>
-                  </a:schemeClr>
-                </a:solidFill>
-              </a:rPr>
-              <a:t>Reflexion</a:t>
-            </a:r>
-            <a:r>
               <a:rPr lang="en-US" sz="2000" dirty="0">
                 <a:solidFill>
                   <a:schemeClr val="accent6">
@@ -4932,7 +6643,7 @@
                   </a:schemeClr>
                 </a:solidFill>
               </a:rPr>
-              <a:t> (review weaknesses)</a:t>
+              <a:t>Reflexion (review weaknesses)</a:t>
             </a:r>
           </a:p>
           <a:p>
@@ -4967,7 +6678,7 @@
 </p:sld>
 </file>
 
-<file path=ppt/slides/slide15.xml><?xml version="1.0" encoding="utf-8"?>
+<file path=ppt/slides/slide21.xml><?xml version="1.0" encoding="utf-8"?>
 <p:sld xmlns:a="http://schemas.openxmlformats.org/drawingml/2006/main" xmlns:r="http://schemas.openxmlformats.org/officeDocument/2006/relationships" xmlns:p="http://schemas.openxmlformats.org/presentationml/2006/main">
   <p:cSld>
     <p:spTree>
@@ -5003,7 +6714,7 @@
 </p:sld>
 </file>
 
-<file path=ppt/slides/slide2.xml><?xml version="1.0" encoding="utf-8"?>
+<file path=ppt/slides/slide3.xml><?xml version="1.0" encoding="utf-8"?>
 <p:sld xmlns:a="http://schemas.openxmlformats.org/drawingml/2006/main" xmlns:r="http://schemas.openxmlformats.org/officeDocument/2006/relationships" xmlns:p="http://schemas.openxmlformats.org/presentationml/2006/main">
   <p:cSld>
     <p:spTree>
@@ -5011,7 +6722,7 @@
         <p:cNvPr id="1" name="">
           <a:extLst>
             <a:ext uri="{FF2B5EF4-FFF2-40B4-BE49-F238E27FC236}">
-              <a16:creationId xmlns:a16="http://schemas.microsoft.com/office/drawing/2014/main" id="{C0DC4EE4-7CB9-DC2F-6583-CEFEBED4EA2E}"/>
+              <a16:creationId xmlns:a16="http://schemas.microsoft.com/office/drawing/2014/main" id="{BEE1BDB6-ED34-C4A8-E1B6-5AB18CCF1C0F}"/>
             </a:ext>
           </a:extLst>
         </p:cNvPr>
@@ -5031,7 +6742,7 @@
           <p:cNvPr id="4" name="TextBox 3">
             <a:extLst>
               <a:ext uri="{FF2B5EF4-FFF2-40B4-BE49-F238E27FC236}">
-                <a16:creationId xmlns:a16="http://schemas.microsoft.com/office/drawing/2014/main" id="{34D9E2B6-28AD-DF63-1020-0A3F17443414}"/>
+                <a16:creationId xmlns:a16="http://schemas.microsoft.com/office/drawing/2014/main" id="{CC237422-8158-ADEB-D2AD-D3D3701C8C16}"/>
               </a:ext>
             </a:extLst>
           </p:cNvPr>
@@ -5288,7 +6999,7 @@
     </p:spTree>
     <p:extLst>
       <p:ext uri="{BB962C8B-B14F-4D97-AF65-F5344CB8AC3E}">
-        <p14:creationId xmlns:p14="http://schemas.microsoft.com/office/powerpoint/2010/main" val="3227882609"/>
+        <p14:creationId xmlns:p14="http://schemas.microsoft.com/office/powerpoint/2010/main" val="551350505"/>
       </p:ext>
     </p:extLst>
   </p:cSld>
@@ -5298,7 +7009,7 @@
 </p:sld>
 </file>
 
-<file path=ppt/slides/slide3.xml><?xml version="1.0" encoding="utf-8"?>
+<file path=ppt/slides/slide4.xml><?xml version="1.0" encoding="utf-8"?>
 <p:sld xmlns:a="http://schemas.openxmlformats.org/drawingml/2006/main" xmlns:r="http://schemas.openxmlformats.org/officeDocument/2006/relationships" xmlns:p="http://schemas.openxmlformats.org/presentationml/2006/main">
   <p:cSld>
     <p:spTree>
@@ -5445,7 +7156,7 @@
 </p:sld>
 </file>
 
-<file path=ppt/slides/slide4.xml><?xml version="1.0" encoding="utf-8"?>
+<file path=ppt/slides/slide5.xml><?xml version="1.0" encoding="utf-8"?>
 <p:sld xmlns:a="http://schemas.openxmlformats.org/drawingml/2006/main" xmlns:r="http://schemas.openxmlformats.org/officeDocument/2006/relationships" xmlns:p="http://schemas.openxmlformats.org/presentationml/2006/main">
   <p:cSld>
     <p:spTree>
@@ -5483,7 +7194,7 @@
         <p:spPr>
           <a:xfrm>
             <a:off x="530352" y="669490"/>
-            <a:ext cx="10780776" cy="5262979"/>
+            <a:ext cx="7772400" cy="5262979"/>
           </a:xfrm>
           <a:prstGeom prst="rect">
             <a:avLst/>
@@ -5670,6 +7381,36 @@
           </a:p>
         </p:txBody>
       </p:sp>
+      <p:pic>
+        <p:nvPicPr>
+          <p:cNvPr id="3" name="Picture 2">
+            <a:extLst>
+              <a:ext uri="{FF2B5EF4-FFF2-40B4-BE49-F238E27FC236}">
+                <a16:creationId xmlns:a16="http://schemas.microsoft.com/office/drawing/2014/main" id="{22E18379-A3C2-1E66-4198-AC6605DA09EC}"/>
+              </a:ext>
+            </a:extLst>
+          </p:cNvPr>
+          <p:cNvPicPr>
+            <a:picLocks noChangeAspect="1"/>
+          </p:cNvPicPr>
+          <p:nvPr/>
+        </p:nvPicPr>
+        <p:blipFill>
+          <a:blip r:embed="rId2"/>
+          <a:stretch>
+            <a:fillRect/>
+          </a:stretch>
+        </p:blipFill>
+        <p:spPr>
+          <a:xfrm>
+            <a:off x="7018689" y="2505456"/>
+            <a:ext cx="4943235" cy="2785352"/>
+          </a:xfrm>
+          <a:prstGeom prst="rect">
+            <a:avLst/>
+          </a:prstGeom>
+        </p:spPr>
+      </p:pic>
     </p:spTree>
     <p:extLst>
       <p:ext uri="{BB962C8B-B14F-4D97-AF65-F5344CB8AC3E}">
@@ -5683,7 +7424,7 @@
 </p:sld>
 </file>
 
-<file path=ppt/slides/slide5.xml><?xml version="1.0" encoding="utf-8"?>
+<file path=ppt/slides/slide6.xml><?xml version="1.0" encoding="utf-8"?>
 <p:sld xmlns:a="http://schemas.openxmlformats.org/drawingml/2006/main" xmlns:r="http://schemas.openxmlformats.org/officeDocument/2006/relationships" xmlns:p="http://schemas.openxmlformats.org/presentationml/2006/main">
   <p:cSld>
     <p:spTree>
@@ -5720,8 +7461,8 @@
         </p:nvSpPr>
         <p:spPr>
           <a:xfrm>
-            <a:off x="594360" y="962098"/>
-            <a:ext cx="10780776" cy="3046988"/>
+            <a:off x="283464" y="117693"/>
+            <a:ext cx="10780776" cy="6740307"/>
           </a:xfrm>
           <a:prstGeom prst="rect">
             <a:avLst/>
@@ -5735,15 +7476,15 @@
           <a:lstStyle/>
           <a:p>
             <a:r>
-              <a:rPr lang="en-US" sz="2400" b="1" dirty="0">
-                <a:solidFill>
-                  <a:schemeClr val="accent6">
-                    <a:lumMod val="60000"/>
-                    <a:lumOff val="40000"/>
-                  </a:schemeClr>
-                </a:solidFill>
-              </a:rPr>
-              <a:t>When to Use Tree of Thoughts</a:t>
+              <a:rPr lang="en-US" sz="2400" dirty="0">
+                <a:solidFill>
+                  <a:schemeClr val="accent6">
+                    <a:lumMod val="60000"/>
+                    <a:lumOff val="40000"/>
+                  </a:schemeClr>
+                </a:solidFill>
+              </a:rPr>
+              <a:t>You are an AI Solution Architect.</a:t>
             </a:r>
           </a:p>
           <a:p>
@@ -5766,14 +7507,20 @@
                   </a:schemeClr>
                 </a:solidFill>
               </a:rPr>
-              <a:t>Tree of Thoughts is useful when:</a:t>
-            </a:r>
-          </a:p>
-          <a:p>
-            <a:pPr marL="342900" lvl="0" indent="-342900">
-              <a:buFont typeface="Arial" panose="020B0604020202020204" pitchFamily="34" charset="0"/>
-              <a:buChar char="•"/>
-            </a:pPr>
+              <a:t>Problem: Design an AI agent that can answer questions from PDF documents.</a:t>
+            </a:r>
+          </a:p>
+          <a:p>
+            <a:endParaRPr lang="en-US" sz="2400" dirty="0">
+              <a:solidFill>
+                <a:schemeClr val="accent6">
+                  <a:lumMod val="60000"/>
+                  <a:lumOff val="40000"/>
+                </a:schemeClr>
+              </a:solidFill>
+            </a:endParaRPr>
+          </a:p>
+          <a:p>
             <a:r>
               <a:rPr lang="en-US" sz="2400" dirty="0">
                 <a:solidFill>
@@ -5783,14 +7530,20 @@
                   </a:schemeClr>
                 </a:solidFill>
               </a:rPr>
-              <a:t>Making strategic decisions</a:t>
-            </a:r>
-          </a:p>
-          <a:p>
-            <a:pPr marL="342900" lvl="0" indent="-342900">
-              <a:buFont typeface="Arial" panose="020B0604020202020204" pitchFamily="34" charset="0"/>
-              <a:buChar char="•"/>
-            </a:pPr>
+              <a:t>Use Tree of Thought reasoning.</a:t>
+            </a:r>
+          </a:p>
+          <a:p>
+            <a:endParaRPr lang="en-US" sz="2400" dirty="0">
+              <a:solidFill>
+                <a:schemeClr val="accent6">
+                  <a:lumMod val="60000"/>
+                  <a:lumOff val="40000"/>
+                </a:schemeClr>
+              </a:solidFill>
+            </a:endParaRPr>
+          </a:p>
+          <a:p>
             <a:r>
               <a:rPr lang="en-US" sz="2400" dirty="0">
                 <a:solidFill>
@@ -5800,14 +7553,20 @@
                   </a:schemeClr>
                 </a:solidFill>
               </a:rPr>
-              <a:t>Brainstorming creative solutions</a:t>
-            </a:r>
-          </a:p>
-          <a:p>
-            <a:pPr marL="342900" lvl="0" indent="-342900">
-              <a:buFont typeface="Arial" panose="020B0604020202020204" pitchFamily="34" charset="0"/>
-              <a:buChar char="•"/>
-            </a:pPr>
+              <a:t>Step 1: Generate at least 4 different architectures.</a:t>
+            </a:r>
+          </a:p>
+          <a:p>
+            <a:endParaRPr lang="en-US" sz="2400" dirty="0">
+              <a:solidFill>
+                <a:schemeClr val="accent6">
+                  <a:lumMod val="60000"/>
+                  <a:lumOff val="40000"/>
+                </a:schemeClr>
+              </a:solidFill>
+            </a:endParaRPr>
+          </a:p>
+          <a:p>
             <a:r>
               <a:rPr lang="en-US" sz="2400" dirty="0">
                 <a:solidFill>
@@ -5817,14 +7576,10 @@
                   </a:schemeClr>
                 </a:solidFill>
               </a:rPr>
-              <a:t>Solving complex business or technical problems</a:t>
-            </a:r>
-          </a:p>
-          <a:p>
-            <a:pPr marL="342900" lvl="0" indent="-342900">
-              <a:buFont typeface="Arial" panose="020B0604020202020204" pitchFamily="34" charset="0"/>
-              <a:buChar char="•"/>
-            </a:pPr>
+              <a:t>Step 2: For each architecture, explain:</a:t>
+            </a:r>
+          </a:p>
+          <a:p>
             <a:r>
               <a:rPr lang="en-US" sz="2400" dirty="0">
                 <a:solidFill>
@@ -5834,14 +7589,10 @@
                   </a:schemeClr>
                 </a:solidFill>
               </a:rPr>
-              <a:t>Evaluating multiple alternatives</a:t>
-            </a:r>
-          </a:p>
-          <a:p>
-            <a:pPr marL="342900" lvl="0" indent="-342900">
-              <a:buFont typeface="Arial" panose="020B0604020202020204" pitchFamily="34" charset="0"/>
-              <a:buChar char="•"/>
-            </a:pPr>
+              <a:t>- How it works</a:t>
+            </a:r>
+          </a:p>
+          <a:p>
             <a:r>
               <a:rPr lang="en-US" sz="2400" dirty="0">
                 <a:solidFill>
@@ -5851,7 +7602,92 @@
                   </a:schemeClr>
                 </a:solidFill>
               </a:rPr>
-              <a:t>Planning projects</a:t>
+              <a:t>- Components required</a:t>
+            </a:r>
+          </a:p>
+          <a:p>
+            <a:r>
+              <a:rPr lang="en-US" sz="2400" dirty="0">
+                <a:solidFill>
+                  <a:schemeClr val="accent6">
+                    <a:lumMod val="60000"/>
+                    <a:lumOff val="40000"/>
+                  </a:schemeClr>
+                </a:solidFill>
+              </a:rPr>
+              <a:t>- Advantages</a:t>
+            </a:r>
+          </a:p>
+          <a:p>
+            <a:r>
+              <a:rPr lang="en-US" sz="2400" dirty="0">
+                <a:solidFill>
+                  <a:schemeClr val="accent6">
+                    <a:lumMod val="60000"/>
+                    <a:lumOff val="40000"/>
+                  </a:schemeClr>
+                </a:solidFill>
+              </a:rPr>
+              <a:t>- Limitations</a:t>
+            </a:r>
+          </a:p>
+          <a:p>
+            <a:endParaRPr lang="en-US" sz="2400" dirty="0">
+              <a:solidFill>
+                <a:schemeClr val="accent6">
+                  <a:lumMod val="60000"/>
+                  <a:lumOff val="40000"/>
+                </a:schemeClr>
+              </a:solidFill>
+            </a:endParaRPr>
+          </a:p>
+          <a:p>
+            <a:r>
+              <a:rPr lang="en-US" sz="2400" dirty="0">
+                <a:solidFill>
+                  <a:schemeClr val="accent6">
+                    <a:lumMod val="60000"/>
+                    <a:lumOff val="40000"/>
+                  </a:schemeClr>
+                </a:solidFill>
+              </a:rPr>
+              <a:t>Step 3: Compare architectures on Accuracy, Cost, Scalability</a:t>
+            </a:r>
+          </a:p>
+          <a:p>
+            <a:endParaRPr lang="en-US" sz="2400" dirty="0">
+              <a:solidFill>
+                <a:schemeClr val="accent6">
+                  <a:lumMod val="60000"/>
+                  <a:lumOff val="40000"/>
+                </a:schemeClr>
+              </a:solidFill>
+            </a:endParaRPr>
+          </a:p>
+          <a:p>
+            <a:r>
+              <a:rPr lang="en-US" sz="2400" dirty="0">
+                <a:solidFill>
+                  <a:schemeClr val="accent6">
+                    <a:lumMod val="60000"/>
+                    <a:lumOff val="40000"/>
+                  </a:schemeClr>
+                </a:solidFill>
+              </a:rPr>
+              <a:t>Step 4: Select the best architecture and explain why.</a:t>
+            </a:r>
+          </a:p>
+          <a:p>
+            <a:r>
+              <a:rPr lang="en-US" sz="2400" dirty="0">
+                <a:solidFill>
+                  <a:schemeClr val="accent6">
+                    <a:lumMod val="60000"/>
+                    <a:lumOff val="40000"/>
+                  </a:schemeClr>
+                </a:solidFill>
+              </a:rPr>
+              <a:t>Show your reasoning as a decision tree.</a:t>
             </a:r>
           </a:p>
         </p:txBody>
@@ -5869,7 +7705,7 @@
 </p:sld>
 </file>
 
-<file path=ppt/slides/slide6.xml><?xml version="1.0" encoding="utf-8"?>
+<file path=ppt/slides/slide7.xml><?xml version="1.0" encoding="utf-8"?>
 <p:sld xmlns:a="http://schemas.openxmlformats.org/drawingml/2006/main" xmlns:r="http://schemas.openxmlformats.org/officeDocument/2006/relationships" xmlns:p="http://schemas.openxmlformats.org/presentationml/2006/main">
   <p:cSld>
     <p:spTree>
@@ -5877,7 +7713,73 @@
         <p:cNvPr id="1" name="">
           <a:extLst>
             <a:ext uri="{FF2B5EF4-FFF2-40B4-BE49-F238E27FC236}">
-              <a16:creationId xmlns:a16="http://schemas.microsoft.com/office/drawing/2014/main" id="{5A151B52-7056-10DF-A6C3-BCC15C9176A0}"/>
+              <a16:creationId xmlns:a16="http://schemas.microsoft.com/office/drawing/2014/main" id="{3CAF3AC7-673C-B945-18A0-B8D9983B676A}"/>
+            </a:ext>
+          </a:extLst>
+        </p:cNvPr>
+        <p:cNvGrpSpPr/>
+        <p:nvPr/>
+      </p:nvGrpSpPr>
+      <p:grpSpPr>
+        <a:xfrm>
+          <a:off x="0" y="0"/>
+          <a:ext cx="0" cy="0"/>
+          <a:chOff x="0" y="0"/>
+          <a:chExt cx="0" cy="0"/>
+        </a:xfrm>
+      </p:grpSpPr>
+      <p:pic>
+        <p:nvPicPr>
+          <p:cNvPr id="3" name="Picture 2">
+            <a:extLst>
+              <a:ext uri="{FF2B5EF4-FFF2-40B4-BE49-F238E27FC236}">
+                <a16:creationId xmlns:a16="http://schemas.microsoft.com/office/drawing/2014/main" id="{C7F70226-6D80-C125-0459-906F0B681D6F}"/>
+              </a:ext>
+            </a:extLst>
+          </p:cNvPr>
+          <p:cNvPicPr>
+            <a:picLocks noChangeAspect="1"/>
+          </p:cNvPicPr>
+          <p:nvPr/>
+        </p:nvPicPr>
+        <p:blipFill>
+          <a:blip r:embed="rId2"/>
+          <a:stretch>
+            <a:fillRect/>
+          </a:stretch>
+        </p:blipFill>
+        <p:spPr>
+          <a:xfrm>
+            <a:off x="886401" y="1568196"/>
+            <a:ext cx="10849433" cy="3721608"/>
+          </a:xfrm>
+          <a:prstGeom prst="rect">
+            <a:avLst/>
+          </a:prstGeom>
+        </p:spPr>
+      </p:pic>
+    </p:spTree>
+    <p:extLst>
+      <p:ext uri="{BB962C8B-B14F-4D97-AF65-F5344CB8AC3E}">
+        <p14:creationId xmlns:p14="http://schemas.microsoft.com/office/powerpoint/2010/main" val="4108628444"/>
+      </p:ext>
+    </p:extLst>
+  </p:cSld>
+  <p:clrMapOvr>
+    <a:masterClrMapping/>
+  </p:clrMapOvr>
+</p:sld>
+</file>
+
+<file path=ppt/slides/slide8.xml><?xml version="1.0" encoding="utf-8"?>
+<p:sld xmlns:a="http://schemas.openxmlformats.org/drawingml/2006/main" xmlns:r="http://schemas.openxmlformats.org/officeDocument/2006/relationships" xmlns:p="http://schemas.openxmlformats.org/presentationml/2006/main">
+  <p:cSld>
+    <p:spTree>
+      <p:nvGrpSpPr>
+        <p:cNvPr id="1" name="">
+          <a:extLst>
+            <a:ext uri="{FF2B5EF4-FFF2-40B4-BE49-F238E27FC236}">
+              <a16:creationId xmlns:a16="http://schemas.microsoft.com/office/drawing/2014/main" id="{2CE07943-5F8A-1629-9FA9-272DB983BDBA}"/>
             </a:ext>
           </a:extLst>
         </p:cNvPr>
@@ -5897,7 +7799,7 @@
           <p:cNvPr id="4" name="TextBox 3">
             <a:extLst>
               <a:ext uri="{FF2B5EF4-FFF2-40B4-BE49-F238E27FC236}">
-                <a16:creationId xmlns:a16="http://schemas.microsoft.com/office/drawing/2014/main" id="{49E613FD-060E-9BB1-9F8E-690F34778479}"/>
+                <a16:creationId xmlns:a16="http://schemas.microsoft.com/office/drawing/2014/main" id="{DF7632DA-15B6-F526-ADE9-9095237D1E74}"/>
               </a:ext>
             </a:extLst>
           </p:cNvPr>
@@ -5906,8 +7808,8 @@
         </p:nvSpPr>
         <p:spPr>
           <a:xfrm>
-            <a:off x="594360" y="962098"/>
-            <a:ext cx="10780776" cy="3785652"/>
+            <a:off x="210312" y="0"/>
+            <a:ext cx="7498080" cy="4801314"/>
           </a:xfrm>
           <a:prstGeom prst="rect">
             <a:avLst/>
@@ -5920,42 +7822,244 @@
           </a:bodyPr>
           <a:lstStyle/>
           <a:p>
-            <a:r>
-              <a:rPr lang="en-US" sz="2400" b="1" dirty="0">
-                <a:solidFill>
-                  <a:schemeClr val="accent6">
-                    <a:lumMod val="60000"/>
-                    <a:lumOff val="40000"/>
-                  </a:schemeClr>
-                </a:solidFill>
-              </a:rPr>
-              <a:t>2. </a:t>
-            </a:r>
-            <a:r>
-              <a:rPr lang="en-US" sz="2400" b="1" dirty="0" err="1">
-                <a:solidFill>
-                  <a:schemeClr val="accent6">
-                    <a:lumMod val="60000"/>
-                    <a:lumOff val="40000"/>
-                  </a:schemeClr>
-                </a:solidFill>
-              </a:rPr>
-              <a:t>Reflexion</a:t>
-            </a:r>
-            <a:r>
-              <a:rPr lang="en-US" sz="2400" b="1" dirty="0">
-                <a:solidFill>
-                  <a:schemeClr val="accent6">
-                    <a:lumMod val="60000"/>
-                    <a:lumOff val="40000"/>
-                  </a:schemeClr>
-                </a:solidFill>
-              </a:rPr>
-              <a:t> – Asking AI to Critique and Improve Its Own Output</a:t>
-            </a:r>
-          </a:p>
-          <a:p>
-            <a:endParaRPr lang="en-US" sz="2400" dirty="0">
+            <a:pPr>
+              <a:buNone/>
+            </a:pPr>
+            <a:r>
+              <a:rPr lang="en-US" b="1" dirty="0">
+                <a:solidFill>
+                  <a:schemeClr val="accent6">
+                    <a:lumMod val="60000"/>
+                    <a:lumOff val="40000"/>
+                  </a:schemeClr>
+                </a:solidFill>
+              </a:rPr>
+              <a:t>Branch A: Direct PDF + LLM</a:t>
+            </a:r>
+          </a:p>
+          <a:p>
+            <a:pPr rtl="0">
+              <a:buNone/>
+            </a:pPr>
+            <a:r>
+              <a:rPr lang="en-US" dirty="0">
+                <a:solidFill>
+                  <a:schemeClr val="accent6">
+                    <a:lumMod val="60000"/>
+                    <a:lumOff val="40000"/>
+                  </a:schemeClr>
+                </a:solidFill>
+                <a:latin typeface="Courier New" panose="02070309020205020404" pitchFamily="49" charset="0"/>
+              </a:rPr>
+              <a:t>PDF</a:t>
+            </a:r>
+            <a:br>
+              <a:rPr lang="en-US" dirty="0">
+                <a:solidFill>
+                  <a:schemeClr val="accent6">
+                    <a:lumMod val="60000"/>
+                    <a:lumOff val="40000"/>
+                  </a:schemeClr>
+                </a:solidFill>
+                <a:latin typeface="Courier New" panose="02070309020205020404" pitchFamily="49" charset="0"/>
+              </a:rPr>
+            </a:br>
+            <a:r>
+              <a:rPr lang="en-US" dirty="0">
+                <a:solidFill>
+                  <a:schemeClr val="accent6">
+                    <a:lumMod val="60000"/>
+                    <a:lumOff val="40000"/>
+                  </a:schemeClr>
+                </a:solidFill>
+                <a:latin typeface="Courier New" panose="02070309020205020404" pitchFamily="49" charset="0"/>
+              </a:rPr>
+              <a:t> ↓</a:t>
+            </a:r>
+            <a:br>
+              <a:rPr lang="en-US" dirty="0">
+                <a:solidFill>
+                  <a:schemeClr val="accent6">
+                    <a:lumMod val="60000"/>
+                    <a:lumOff val="40000"/>
+                  </a:schemeClr>
+                </a:solidFill>
+                <a:latin typeface="Courier New" panose="02070309020205020404" pitchFamily="49" charset="0"/>
+              </a:rPr>
+            </a:br>
+            <a:r>
+              <a:rPr lang="en-US" dirty="0">
+                <a:solidFill>
+                  <a:schemeClr val="accent6">
+                    <a:lumMod val="60000"/>
+                    <a:lumOff val="40000"/>
+                  </a:schemeClr>
+                </a:solidFill>
+                <a:latin typeface="Courier New" panose="02070309020205020404" pitchFamily="49" charset="0"/>
+              </a:rPr>
+              <a:t>Text Extraction</a:t>
+            </a:r>
+            <a:br>
+              <a:rPr lang="en-US" dirty="0">
+                <a:solidFill>
+                  <a:schemeClr val="accent6">
+                    <a:lumMod val="60000"/>
+                    <a:lumOff val="40000"/>
+                  </a:schemeClr>
+                </a:solidFill>
+                <a:latin typeface="Courier New" panose="02070309020205020404" pitchFamily="49" charset="0"/>
+              </a:rPr>
+            </a:br>
+            <a:r>
+              <a:rPr lang="en-US" dirty="0">
+                <a:solidFill>
+                  <a:schemeClr val="accent6">
+                    <a:lumMod val="60000"/>
+                    <a:lumOff val="40000"/>
+                  </a:schemeClr>
+                </a:solidFill>
+                <a:latin typeface="Courier New" panose="02070309020205020404" pitchFamily="49" charset="0"/>
+              </a:rPr>
+              <a:t> ↓</a:t>
+            </a:r>
+            <a:br>
+              <a:rPr lang="en-US" dirty="0">
+                <a:solidFill>
+                  <a:schemeClr val="accent6">
+                    <a:lumMod val="60000"/>
+                    <a:lumOff val="40000"/>
+                  </a:schemeClr>
+                </a:solidFill>
+                <a:latin typeface="Courier New" panose="02070309020205020404" pitchFamily="49" charset="0"/>
+              </a:rPr>
+            </a:br>
+            <a:r>
+              <a:rPr lang="en-US" dirty="0">
+                <a:solidFill>
+                  <a:schemeClr val="accent6">
+                    <a:lumMod val="60000"/>
+                    <a:lumOff val="40000"/>
+                  </a:schemeClr>
+                </a:solidFill>
+                <a:latin typeface="Courier New" panose="02070309020205020404" pitchFamily="49" charset="0"/>
+              </a:rPr>
+              <a:t>Entire Text Sent to LLM</a:t>
+            </a:r>
+            <a:br>
+              <a:rPr lang="en-US" dirty="0">
+                <a:solidFill>
+                  <a:schemeClr val="accent6">
+                    <a:lumMod val="60000"/>
+                    <a:lumOff val="40000"/>
+                  </a:schemeClr>
+                </a:solidFill>
+                <a:latin typeface="Courier New" panose="02070309020205020404" pitchFamily="49" charset="0"/>
+              </a:rPr>
+            </a:br>
+            <a:r>
+              <a:rPr lang="en-US" dirty="0">
+                <a:solidFill>
+                  <a:schemeClr val="accent6">
+                    <a:lumMod val="60000"/>
+                    <a:lumOff val="40000"/>
+                  </a:schemeClr>
+                </a:solidFill>
+                <a:latin typeface="Courier New" panose="02070309020205020404" pitchFamily="49" charset="0"/>
+              </a:rPr>
+              <a:t> ↓</a:t>
+            </a:r>
+            <a:br>
+              <a:rPr lang="en-US" dirty="0">
+                <a:solidFill>
+                  <a:schemeClr val="accent6">
+                    <a:lumMod val="60000"/>
+                    <a:lumOff val="40000"/>
+                  </a:schemeClr>
+                </a:solidFill>
+                <a:latin typeface="Courier New" panose="02070309020205020404" pitchFamily="49" charset="0"/>
+              </a:rPr>
+            </a:br>
+            <a:r>
+              <a:rPr lang="en-US" dirty="0">
+                <a:solidFill>
+                  <a:schemeClr val="accent6">
+                    <a:lumMod val="60000"/>
+                    <a:lumOff val="40000"/>
+                  </a:schemeClr>
+                </a:solidFill>
+                <a:latin typeface="Courier New" panose="02070309020205020404" pitchFamily="49" charset="0"/>
+              </a:rPr>
+              <a:t>Answer Generated</a:t>
+            </a:r>
+          </a:p>
+          <a:p>
+            <a:pPr rtl="0">
+              <a:buNone/>
+            </a:pPr>
+            <a:endParaRPr lang="en-US" dirty="0">
+              <a:solidFill>
+                <a:schemeClr val="accent6">
+                  <a:lumMod val="60000"/>
+                  <a:lumOff val="40000"/>
+                </a:schemeClr>
+              </a:solidFill>
+              <a:latin typeface="Courier New" panose="02070309020205020404" pitchFamily="49" charset="0"/>
+            </a:endParaRPr>
+          </a:p>
+          <a:p>
+            <a:pPr>
+              <a:buNone/>
+            </a:pPr>
+            <a:r>
+              <a:rPr lang="en-US" b="1" dirty="0">
+                <a:solidFill>
+                  <a:schemeClr val="accent6">
+                    <a:lumMod val="60000"/>
+                    <a:lumOff val="40000"/>
+                  </a:schemeClr>
+                </a:solidFill>
+              </a:rPr>
+              <a:t>Components Required:  </a:t>
+            </a:r>
+            <a:r>
+              <a:rPr lang="en-US" dirty="0">
+                <a:solidFill>
+                  <a:schemeClr val="accent6">
+                    <a:lumMod val="60000"/>
+                    <a:lumOff val="40000"/>
+                  </a:schemeClr>
+                </a:solidFill>
+              </a:rPr>
+              <a:t>PDF Parser (PyPDF2, </a:t>
+            </a:r>
+            <a:r>
+              <a:rPr lang="en-US" dirty="0" err="1">
+                <a:solidFill>
+                  <a:schemeClr val="accent6">
+                    <a:lumMod val="60000"/>
+                    <a:lumOff val="40000"/>
+                  </a:schemeClr>
+                </a:solidFill>
+              </a:rPr>
+              <a:t>pdfplumber</a:t>
+            </a:r>
+            <a:r>
+              <a:rPr lang="en-US" dirty="0">
+                <a:solidFill>
+                  <a:schemeClr val="accent6">
+                    <a:lumMod val="60000"/>
+                    <a:lumOff val="40000"/>
+                  </a:schemeClr>
+                </a:solidFill>
+              </a:rPr>
+              <a:t>), LLM (GPT, Claude, Gemini) ,Simple Application Layer </a:t>
+            </a:r>
+          </a:p>
+          <a:p>
+            <a:pPr>
+              <a:buNone/>
+            </a:pPr>
+            <a:endParaRPr lang="en-US" dirty="0">
               <a:solidFill>
                 <a:schemeClr val="accent6">
                   <a:lumMod val="60000"/>
@@ -5965,42 +8069,199 @@
             </a:endParaRPr>
           </a:p>
           <a:p>
-            <a:r>
-              <a:rPr lang="en-US" sz="2400" b="1" dirty="0">
-                <a:solidFill>
-                  <a:schemeClr val="accent6">
-                    <a:lumMod val="60000"/>
-                    <a:lumOff val="40000"/>
-                  </a:schemeClr>
-                </a:solidFill>
-              </a:rPr>
-              <a:t>What is </a:t>
-            </a:r>
-            <a:r>
-              <a:rPr lang="en-US" sz="2400" b="1" dirty="0" err="1">
-                <a:solidFill>
-                  <a:schemeClr val="accent6">
-                    <a:lumMod val="60000"/>
-                    <a:lumOff val="40000"/>
-                  </a:schemeClr>
-                </a:solidFill>
-              </a:rPr>
-              <a:t>Reflexion</a:t>
-            </a:r>
-            <a:r>
-              <a:rPr lang="en-US" sz="2400" b="1" dirty="0">
-                <a:solidFill>
-                  <a:schemeClr val="accent6">
-                    <a:lumMod val="60000"/>
-                    <a:lumOff val="40000"/>
-                  </a:schemeClr>
-                </a:solidFill>
-              </a:rPr>
-              <a:t>?</a:t>
-            </a:r>
-          </a:p>
-          <a:p>
-            <a:endParaRPr lang="en-US" sz="2400" dirty="0">
+            <a:pPr>
+              <a:buNone/>
+            </a:pPr>
+            <a:r>
+              <a:rPr lang="en-US" b="1" dirty="0">
+                <a:solidFill>
+                  <a:schemeClr val="accent6">
+                    <a:lumMod val="60000"/>
+                    <a:lumOff val="40000"/>
+                  </a:schemeClr>
+                </a:solidFill>
+              </a:rPr>
+              <a:t>Advantages</a:t>
+            </a:r>
+          </a:p>
+          <a:p>
+            <a:pPr>
+              <a:buNone/>
+            </a:pPr>
+            <a:r>
+              <a:rPr lang="en-US" dirty="0">
+                <a:solidFill>
+                  <a:schemeClr val="accent6">
+                    <a:lumMod val="60000"/>
+                    <a:lumOff val="40000"/>
+                  </a:schemeClr>
+                </a:solidFill>
+              </a:rPr>
+              <a:t>✅ Easiest to build</a:t>
+            </a:r>
+          </a:p>
+          <a:p>
+            <a:pPr>
+              <a:buNone/>
+            </a:pPr>
+            <a:r>
+              <a:rPr lang="en-US" dirty="0">
+                <a:solidFill>
+                  <a:schemeClr val="accent6">
+                    <a:lumMod val="60000"/>
+                    <a:lumOff val="40000"/>
+                  </a:schemeClr>
+                </a:solidFill>
+              </a:rPr>
+              <a:t>✅ No vector database required</a:t>
+            </a:r>
+          </a:p>
+          <a:p>
+            <a:pPr>
+              <a:buNone/>
+            </a:pPr>
+            <a:r>
+              <a:rPr lang="en-US" dirty="0">
+                <a:solidFill>
+                  <a:schemeClr val="accent6">
+                    <a:lumMod val="60000"/>
+                    <a:lumOff val="40000"/>
+                  </a:schemeClr>
+                </a:solidFill>
+              </a:rPr>
+              <a:t>✅ Low development effort</a:t>
+            </a:r>
+          </a:p>
+          <a:p>
+            <a:pPr>
+              <a:buNone/>
+            </a:pPr>
+            <a:r>
+              <a:rPr lang="en-US" dirty="0">
+                <a:solidFill>
+                  <a:schemeClr val="accent6">
+                    <a:lumMod val="60000"/>
+                    <a:lumOff val="40000"/>
+                  </a:schemeClr>
+                </a:solidFill>
+              </a:rPr>
+              <a:t>✅ Good for small documents</a:t>
+            </a:r>
+          </a:p>
+        </p:txBody>
+      </p:sp>
+      <p:sp>
+        <p:nvSpPr>
+          <p:cNvPr id="6" name="TextBox 5">
+            <a:extLst>
+              <a:ext uri="{FF2B5EF4-FFF2-40B4-BE49-F238E27FC236}">
+                <a16:creationId xmlns:a16="http://schemas.microsoft.com/office/drawing/2014/main" id="{56412F81-1357-B139-1D6F-2766206A6F31}"/>
+              </a:ext>
+            </a:extLst>
+          </p:cNvPr>
+          <p:cNvSpPr txBox="1"/>
+          <p:nvPr/>
+        </p:nvSpPr>
+        <p:spPr>
+          <a:xfrm>
+            <a:off x="6348984" y="3093154"/>
+            <a:ext cx="6190488" cy="3416320"/>
+          </a:xfrm>
+          <a:prstGeom prst="rect">
+            <a:avLst/>
+          </a:prstGeom>
+          <a:noFill/>
+        </p:spPr>
+        <p:txBody>
+          <a:bodyPr wrap="square">
+            <a:spAutoFit/>
+          </a:bodyPr>
+          <a:lstStyle/>
+          <a:p>
+            <a:pPr>
+              <a:buNone/>
+            </a:pPr>
+            <a:r>
+              <a:rPr lang="en-US" b="1" dirty="0">
+                <a:solidFill>
+                  <a:schemeClr val="accent6">
+                    <a:lumMod val="60000"/>
+                    <a:lumOff val="40000"/>
+                  </a:schemeClr>
+                </a:solidFill>
+              </a:rPr>
+              <a:t>Limitations</a:t>
+            </a:r>
+          </a:p>
+          <a:p>
+            <a:pPr>
+              <a:buNone/>
+            </a:pPr>
+            <a:r>
+              <a:rPr lang="en-US" dirty="0">
+                <a:solidFill>
+                  <a:schemeClr val="accent6">
+                    <a:lumMod val="60000"/>
+                    <a:lumOff val="40000"/>
+                  </a:schemeClr>
+                </a:solidFill>
+              </a:rPr>
+              <a:t>❌ Context window limitations</a:t>
+            </a:r>
+          </a:p>
+          <a:p>
+            <a:pPr>
+              <a:buNone/>
+            </a:pPr>
+            <a:r>
+              <a:rPr lang="en-US" dirty="0">
+                <a:solidFill>
+                  <a:schemeClr val="accent6">
+                    <a:lumMod val="60000"/>
+                    <a:lumOff val="40000"/>
+                  </a:schemeClr>
+                </a:solidFill>
+              </a:rPr>
+              <a:t>❌ Expensive for large PDFs</a:t>
+            </a:r>
+          </a:p>
+          <a:p>
+            <a:pPr>
+              <a:buNone/>
+            </a:pPr>
+            <a:r>
+              <a:rPr lang="en-US" dirty="0">
+                <a:solidFill>
+                  <a:schemeClr val="accent6">
+                    <a:lumMod val="60000"/>
+                    <a:lumOff val="40000"/>
+                  </a:schemeClr>
+                </a:solidFill>
+              </a:rPr>
+              <a:t>❌ Slow for hundreds of pages</a:t>
+            </a:r>
+          </a:p>
+          <a:p>
+            <a:pPr>
+              <a:buNone/>
+            </a:pPr>
+            <a:r>
+              <a:rPr lang="en-US" dirty="0">
+                <a:solidFill>
+                  <a:schemeClr val="accent6">
+                    <a:lumMod val="60000"/>
+                    <a:lumOff val="40000"/>
+                  </a:schemeClr>
+                </a:solidFill>
+              </a:rPr>
+              <a:t>❌ Cannot efficiently search documents</a:t>
+            </a:r>
+          </a:p>
+          <a:p>
+            <a:pPr>
+              <a:buNone/>
+            </a:pPr>
+            <a:endParaRPr lang="en-US" b="1" dirty="0">
               <a:solidFill>
                 <a:schemeClr val="accent6">
                   <a:lumMod val="60000"/>
@@ -6010,82 +8271,58 @@
             </a:endParaRPr>
           </a:p>
           <a:p>
-            <a:r>
-              <a:rPr lang="en-US" sz="2400" dirty="0" err="1">
-                <a:solidFill>
-                  <a:schemeClr val="accent6">
-                    <a:lumMod val="60000"/>
-                    <a:lumOff val="40000"/>
-                  </a:schemeClr>
-                </a:solidFill>
-              </a:rPr>
-              <a:t>Reflexion</a:t>
-            </a:r>
-            <a:r>
-              <a:rPr lang="en-US" sz="2400" dirty="0">
-                <a:solidFill>
-                  <a:schemeClr val="accent6">
-                    <a:lumMod val="60000"/>
-                    <a:lumOff val="40000"/>
-                  </a:schemeClr>
-                </a:solidFill>
-              </a:rPr>
-              <a:t> is a technique where AI is asked to:</a:t>
-            </a:r>
-          </a:p>
-          <a:p>
-            <a:pPr marL="342900" lvl="0" indent="-342900">
-              <a:buFont typeface="Arial" panose="020B0604020202020204" pitchFamily="34" charset="0"/>
-              <a:buChar char="•"/>
+            <a:pPr>
+              <a:buNone/>
             </a:pPr>
             <a:r>
-              <a:rPr lang="en-US" sz="2400" dirty="0">
-                <a:solidFill>
-                  <a:schemeClr val="accent6">
-                    <a:lumMod val="60000"/>
-                    <a:lumOff val="40000"/>
-                  </a:schemeClr>
-                </a:solidFill>
-              </a:rPr>
-              <a:t>Generate an answer</a:t>
-            </a:r>
-          </a:p>
-          <a:p>
-            <a:pPr marL="342900" lvl="0" indent="-342900">
-              <a:buFont typeface="Arial" panose="020B0604020202020204" pitchFamily="34" charset="0"/>
-              <a:buChar char="•"/>
+              <a:rPr lang="en-US" b="1" dirty="0">
+                <a:solidFill>
+                  <a:schemeClr val="accent6">
+                    <a:lumMod val="60000"/>
+                    <a:lumOff val="40000"/>
+                  </a:schemeClr>
+                </a:solidFill>
+              </a:rPr>
+              <a:t>Example</a:t>
+            </a:r>
+          </a:p>
+          <a:p>
+            <a:pPr>
+              <a:buNone/>
             </a:pPr>
             <a:r>
-              <a:rPr lang="en-US" sz="2400" dirty="0">
-                <a:solidFill>
-                  <a:schemeClr val="accent6">
-                    <a:lumMod val="60000"/>
-                    <a:lumOff val="40000"/>
-                  </a:schemeClr>
-                </a:solidFill>
-              </a:rPr>
-              <a:t>Critically analyze its answer</a:t>
-            </a:r>
-          </a:p>
-          <a:p>
-            <a:pPr marL="342900" lvl="0" indent="-342900">
-              <a:buFont typeface="Arial" panose="020B0604020202020204" pitchFamily="34" charset="0"/>
-              <a:buChar char="•"/>
+              <a:rPr lang="en-US" dirty="0">
+                <a:solidFill>
+                  <a:schemeClr val="accent6">
+                    <a:lumMod val="60000"/>
+                    <a:lumOff val="40000"/>
+                  </a:schemeClr>
+                </a:solidFill>
+              </a:rPr>
+              <a:t>A user uploads a 10-page report.</a:t>
+            </a:r>
+          </a:p>
+          <a:p>
+            <a:pPr>
+              <a:buNone/>
             </a:pPr>
             <a:r>
-              <a:rPr lang="en-US" sz="2400" dirty="0">
-                <a:solidFill>
-                  <a:schemeClr val="accent6">
-                    <a:lumMod val="60000"/>
-                    <a:lumOff val="40000"/>
-                  </a:schemeClr>
-                </a:solidFill>
-              </a:rPr>
-              <a:t>Improve or correct its response</a:t>
-            </a:r>
-          </a:p>
-          <a:p>
-            <a:endParaRPr lang="en-US" sz="2400" dirty="0">
+              <a:rPr lang="en-US" dirty="0">
+                <a:solidFill>
+                  <a:schemeClr val="accent6">
+                    <a:lumMod val="60000"/>
+                    <a:lumOff val="40000"/>
+                  </a:schemeClr>
+                </a:solidFill>
+              </a:rPr>
+              <a:t>Entire report is sent to the LLM.</a:t>
+            </a:r>
+          </a:p>
+          <a:p>
+            <a:pPr>
+              <a:buNone/>
+            </a:pPr>
+            <a:endParaRPr lang="en-US" dirty="0">
               <a:solidFill>
                 <a:schemeClr val="accent6">
                   <a:lumMod val="60000"/>
@@ -6095,16 +8332,35 @@
             </a:endParaRPr>
           </a:p>
           <a:p>
-            <a:r>
-              <a:rPr lang="en-US" sz="2400" dirty="0">
-                <a:solidFill>
-                  <a:schemeClr val="accent6">
-                    <a:lumMod val="60000"/>
-                    <a:lumOff val="40000"/>
-                  </a:schemeClr>
-                </a:solidFill>
-              </a:rPr>
-              <a:t>This technique helps AI simulate self-review and quality improvement.</a:t>
+            <a:pPr>
+              <a:buNone/>
+            </a:pPr>
+            <a:r>
+              <a:rPr lang="en-US" dirty="0">
+                <a:solidFill>
+                  <a:schemeClr val="accent6">
+                    <a:lumMod val="60000"/>
+                    <a:lumOff val="40000"/>
+                  </a:schemeClr>
+                </a:solidFill>
+              </a:rPr>
+              <a:t>Question: What were the Q4 sales figures?</a:t>
+            </a:r>
+          </a:p>
+          <a:p>
+            <a:pPr>
+              <a:buNone/>
+            </a:pPr>
+            <a:r>
+              <a:rPr lang="en-US" dirty="0">
+                <a:solidFill>
+                  <a:schemeClr val="accent6">
+                    <a:lumMod val="60000"/>
+                    <a:lumOff val="40000"/>
+                  </a:schemeClr>
+                </a:solidFill>
+              </a:rPr>
+              <a:t>LLM reads all 10 pages and answers.</a:t>
             </a:r>
           </a:p>
         </p:txBody>
@@ -6112,7 +8368,7 @@
     </p:spTree>
     <p:extLst>
       <p:ext uri="{BB962C8B-B14F-4D97-AF65-F5344CB8AC3E}">
-        <p14:creationId xmlns:p14="http://schemas.microsoft.com/office/powerpoint/2010/main" val="3841657524"/>
+        <p14:creationId xmlns:p14="http://schemas.microsoft.com/office/powerpoint/2010/main" val="946938135"/>
       </p:ext>
     </p:extLst>
   </p:cSld>
@@ -6122,7 +8378,7 @@
 </p:sld>
 </file>
 
-<file path=ppt/slides/slide7.xml><?xml version="1.0" encoding="utf-8"?>
+<file path=ppt/slides/slide9.xml><?xml version="1.0" encoding="utf-8"?>
 <p:sld xmlns:a="http://schemas.openxmlformats.org/drawingml/2006/main" xmlns:r="http://schemas.openxmlformats.org/officeDocument/2006/relationships" xmlns:p="http://schemas.openxmlformats.org/presentationml/2006/main">
   <p:cSld>
     <p:spTree>
@@ -6130,7 +8386,7 @@
         <p:cNvPr id="1" name="">
           <a:extLst>
             <a:ext uri="{FF2B5EF4-FFF2-40B4-BE49-F238E27FC236}">
-              <a16:creationId xmlns:a16="http://schemas.microsoft.com/office/drawing/2014/main" id="{99756AD4-5FB2-D1D3-FCD5-4DF1BEF3D2A6}"/>
+              <a16:creationId xmlns:a16="http://schemas.microsoft.com/office/drawing/2014/main" id="{AC5C1603-681D-B9E3-2BDC-FE1B0DE6BC73}"/>
             </a:ext>
           </a:extLst>
         </p:cNvPr>
@@ -6150,7 +8406,7 @@
           <p:cNvPr id="4" name="TextBox 3">
             <a:extLst>
               <a:ext uri="{FF2B5EF4-FFF2-40B4-BE49-F238E27FC236}">
-                <a16:creationId xmlns:a16="http://schemas.microsoft.com/office/drawing/2014/main" id="{6729781D-9EE0-DEB0-55AD-8492AA6D98B1}"/>
+                <a16:creationId xmlns:a16="http://schemas.microsoft.com/office/drawing/2014/main" id="{B52D91C9-3102-731E-1D49-9E084DC5564A}"/>
               </a:ext>
             </a:extLst>
           </p:cNvPr>
@@ -6159,8 +8415,8 @@
         </p:nvSpPr>
         <p:spPr>
           <a:xfrm>
-            <a:off x="594360" y="962098"/>
-            <a:ext cx="10780776" cy="2677656"/>
+            <a:off x="210312" y="0"/>
+            <a:ext cx="10479024" cy="5940088"/>
           </a:xfrm>
           <a:prstGeom prst="rect">
             <a:avLst/>
@@ -6174,28 +8430,326 @@
           <a:lstStyle/>
           <a:p>
             <a:r>
-              <a:rPr lang="en-US" sz="2400" b="1" dirty="0">
-                <a:solidFill>
-                  <a:schemeClr val="accent6">
-                    <a:lumMod val="60000"/>
-                    <a:lumOff val="40000"/>
-                  </a:schemeClr>
-                </a:solidFill>
-              </a:rPr>
-              <a:t>Example Without </a:t>
-            </a:r>
-            <a:r>
-              <a:rPr lang="en-US" sz="2400" b="1" dirty="0" err="1">
-                <a:solidFill>
-                  <a:schemeClr val="accent6">
-                    <a:lumMod val="60000"/>
-                    <a:lumOff val="40000"/>
-                  </a:schemeClr>
-                </a:solidFill>
-              </a:rPr>
-              <a:t>Reflexion</a:t>
-            </a:r>
-            <a:endParaRPr lang="en-US" sz="2400" b="1" dirty="0">
+              <a:rPr lang="en-US" sz="2000" b="1" dirty="0">
+                <a:solidFill>
+                  <a:schemeClr val="accent6">
+                    <a:lumMod val="60000"/>
+                    <a:lumOff val="40000"/>
+                  </a:schemeClr>
+                </a:solidFill>
+              </a:rPr>
+              <a:t>Branch B: RAG (Retrieval-Augmented Generation)</a:t>
+            </a:r>
+          </a:p>
+          <a:p>
+            <a:r>
+              <a:rPr lang="en-US" sz="2000" dirty="0">
+                <a:solidFill>
+                  <a:schemeClr val="accent6">
+                    <a:lumMod val="60000"/>
+                    <a:lumOff val="40000"/>
+                  </a:schemeClr>
+                </a:solidFill>
+              </a:rPr>
+              <a:t>PDF</a:t>
+            </a:r>
+            <a:br>
+              <a:rPr lang="en-US" sz="2000" dirty="0">
+                <a:solidFill>
+                  <a:schemeClr val="accent6">
+                    <a:lumMod val="60000"/>
+                    <a:lumOff val="40000"/>
+                  </a:schemeClr>
+                </a:solidFill>
+              </a:rPr>
+            </a:br>
+            <a:r>
+              <a:rPr lang="en-US" sz="2000" dirty="0">
+                <a:solidFill>
+                  <a:schemeClr val="accent6">
+                    <a:lumMod val="60000"/>
+                    <a:lumOff val="40000"/>
+                  </a:schemeClr>
+                </a:solidFill>
+              </a:rPr>
+              <a:t> ↓</a:t>
+            </a:r>
+            <a:br>
+              <a:rPr lang="en-US" sz="2000" dirty="0">
+                <a:solidFill>
+                  <a:schemeClr val="accent6">
+                    <a:lumMod val="60000"/>
+                    <a:lumOff val="40000"/>
+                  </a:schemeClr>
+                </a:solidFill>
+              </a:rPr>
+            </a:br>
+            <a:r>
+              <a:rPr lang="en-US" sz="2000" dirty="0">
+                <a:solidFill>
+                  <a:schemeClr val="accent6">
+                    <a:lumMod val="60000"/>
+                    <a:lumOff val="40000"/>
+                  </a:schemeClr>
+                </a:solidFill>
+              </a:rPr>
+              <a:t>Text Extraction</a:t>
+            </a:r>
+            <a:br>
+              <a:rPr lang="en-US" sz="2000" dirty="0">
+                <a:solidFill>
+                  <a:schemeClr val="accent6">
+                    <a:lumMod val="60000"/>
+                    <a:lumOff val="40000"/>
+                  </a:schemeClr>
+                </a:solidFill>
+              </a:rPr>
+            </a:br>
+            <a:r>
+              <a:rPr lang="en-US" sz="2000" dirty="0">
+                <a:solidFill>
+                  <a:schemeClr val="accent6">
+                    <a:lumMod val="60000"/>
+                    <a:lumOff val="40000"/>
+                  </a:schemeClr>
+                </a:solidFill>
+              </a:rPr>
+              <a:t> ↓</a:t>
+            </a:r>
+            <a:br>
+              <a:rPr lang="en-US" sz="2000" dirty="0">
+                <a:solidFill>
+                  <a:schemeClr val="accent6">
+                    <a:lumMod val="60000"/>
+                    <a:lumOff val="40000"/>
+                  </a:schemeClr>
+                </a:solidFill>
+              </a:rPr>
+            </a:br>
+            <a:r>
+              <a:rPr lang="en-US" sz="2000" dirty="0">
+                <a:solidFill>
+                  <a:schemeClr val="accent6">
+                    <a:lumMod val="60000"/>
+                    <a:lumOff val="40000"/>
+                  </a:schemeClr>
+                </a:solidFill>
+              </a:rPr>
+              <a:t>Chunking</a:t>
+            </a:r>
+            <a:br>
+              <a:rPr lang="en-US" sz="2000" dirty="0">
+                <a:solidFill>
+                  <a:schemeClr val="accent6">
+                    <a:lumMod val="60000"/>
+                    <a:lumOff val="40000"/>
+                  </a:schemeClr>
+                </a:solidFill>
+              </a:rPr>
+            </a:br>
+            <a:r>
+              <a:rPr lang="en-US" sz="2000" dirty="0">
+                <a:solidFill>
+                  <a:schemeClr val="accent6">
+                    <a:lumMod val="60000"/>
+                    <a:lumOff val="40000"/>
+                  </a:schemeClr>
+                </a:solidFill>
+              </a:rPr>
+              <a:t> ↓</a:t>
+            </a:r>
+            <a:br>
+              <a:rPr lang="en-US" sz="2000" dirty="0">
+                <a:solidFill>
+                  <a:schemeClr val="accent6">
+                    <a:lumMod val="60000"/>
+                    <a:lumOff val="40000"/>
+                  </a:schemeClr>
+                </a:solidFill>
+              </a:rPr>
+            </a:br>
+            <a:r>
+              <a:rPr lang="en-US" sz="2000" dirty="0">
+                <a:solidFill>
+                  <a:schemeClr val="accent6">
+                    <a:lumMod val="60000"/>
+                    <a:lumOff val="40000"/>
+                  </a:schemeClr>
+                </a:solidFill>
+              </a:rPr>
+              <a:t>Embeddings</a:t>
+            </a:r>
+            <a:br>
+              <a:rPr lang="en-US" sz="2000" dirty="0">
+                <a:solidFill>
+                  <a:schemeClr val="accent6">
+                    <a:lumMod val="60000"/>
+                    <a:lumOff val="40000"/>
+                  </a:schemeClr>
+                </a:solidFill>
+              </a:rPr>
+            </a:br>
+            <a:r>
+              <a:rPr lang="en-US" sz="2000" dirty="0">
+                <a:solidFill>
+                  <a:schemeClr val="accent6">
+                    <a:lumMod val="60000"/>
+                    <a:lumOff val="40000"/>
+                  </a:schemeClr>
+                </a:solidFill>
+              </a:rPr>
+              <a:t> ↓</a:t>
+            </a:r>
+            <a:br>
+              <a:rPr lang="en-US" sz="2000" dirty="0">
+                <a:solidFill>
+                  <a:schemeClr val="accent6">
+                    <a:lumMod val="60000"/>
+                    <a:lumOff val="40000"/>
+                  </a:schemeClr>
+                </a:solidFill>
+              </a:rPr>
+            </a:br>
+            <a:r>
+              <a:rPr lang="en-US" sz="2000" dirty="0">
+                <a:solidFill>
+                  <a:schemeClr val="accent6">
+                    <a:lumMod val="60000"/>
+                    <a:lumOff val="40000"/>
+                  </a:schemeClr>
+                </a:solidFill>
+              </a:rPr>
+              <a:t>Vector Database</a:t>
+            </a:r>
+            <a:br>
+              <a:rPr lang="en-US" sz="2000" dirty="0">
+                <a:solidFill>
+                  <a:schemeClr val="accent6">
+                    <a:lumMod val="60000"/>
+                    <a:lumOff val="40000"/>
+                  </a:schemeClr>
+                </a:solidFill>
+              </a:rPr>
+            </a:br>
+            <a:r>
+              <a:rPr lang="en-US" sz="2000" dirty="0">
+                <a:solidFill>
+                  <a:schemeClr val="accent6">
+                    <a:lumMod val="60000"/>
+                    <a:lumOff val="40000"/>
+                  </a:schemeClr>
+                </a:solidFill>
+              </a:rPr>
+              <a:t> ↓</a:t>
+            </a:r>
+            <a:br>
+              <a:rPr lang="en-US" sz="2000" dirty="0">
+                <a:solidFill>
+                  <a:schemeClr val="accent6">
+                    <a:lumMod val="60000"/>
+                    <a:lumOff val="40000"/>
+                  </a:schemeClr>
+                </a:solidFill>
+              </a:rPr>
+            </a:br>
+            <a:r>
+              <a:rPr lang="en-US" sz="2000" dirty="0">
+                <a:solidFill>
+                  <a:schemeClr val="accent6">
+                    <a:lumMod val="60000"/>
+                    <a:lumOff val="40000"/>
+                  </a:schemeClr>
+                </a:solidFill>
+              </a:rPr>
+              <a:t>Retriever</a:t>
+            </a:r>
+            <a:br>
+              <a:rPr lang="en-US" sz="2000" dirty="0">
+                <a:solidFill>
+                  <a:schemeClr val="accent6">
+                    <a:lumMod val="60000"/>
+                    <a:lumOff val="40000"/>
+                  </a:schemeClr>
+                </a:solidFill>
+              </a:rPr>
+            </a:br>
+            <a:r>
+              <a:rPr lang="en-US" sz="2000" dirty="0">
+                <a:solidFill>
+                  <a:schemeClr val="accent6">
+                    <a:lumMod val="60000"/>
+                    <a:lumOff val="40000"/>
+                  </a:schemeClr>
+                </a:solidFill>
+              </a:rPr>
+              <a:t> ↓</a:t>
+            </a:r>
+            <a:br>
+              <a:rPr lang="en-US" sz="2000" dirty="0">
+                <a:solidFill>
+                  <a:schemeClr val="accent6">
+                    <a:lumMod val="60000"/>
+                    <a:lumOff val="40000"/>
+                  </a:schemeClr>
+                </a:solidFill>
+              </a:rPr>
+            </a:br>
+            <a:r>
+              <a:rPr lang="en-US" sz="2000" dirty="0">
+                <a:solidFill>
+                  <a:schemeClr val="accent6">
+                    <a:lumMod val="60000"/>
+                    <a:lumOff val="40000"/>
+                  </a:schemeClr>
+                </a:solidFill>
+              </a:rPr>
+              <a:t>LLM</a:t>
+            </a:r>
+            <a:br>
+              <a:rPr lang="en-US" sz="2000" dirty="0">
+                <a:solidFill>
+                  <a:schemeClr val="accent6">
+                    <a:lumMod val="60000"/>
+                    <a:lumOff val="40000"/>
+                  </a:schemeClr>
+                </a:solidFill>
+              </a:rPr>
+            </a:br>
+            <a:r>
+              <a:rPr lang="en-US" sz="2000" dirty="0">
+                <a:solidFill>
+                  <a:schemeClr val="accent6">
+                    <a:lumMod val="60000"/>
+                    <a:lumOff val="40000"/>
+                  </a:schemeClr>
+                </a:solidFill>
+              </a:rPr>
+              <a:t> ↓</a:t>
+            </a:r>
+            <a:br>
+              <a:rPr lang="en-US" sz="2000" dirty="0">
+                <a:solidFill>
+                  <a:schemeClr val="accent6">
+                    <a:lumMod val="60000"/>
+                    <a:lumOff val="40000"/>
+                  </a:schemeClr>
+                </a:solidFill>
+              </a:rPr>
+            </a:br>
+            <a:r>
+              <a:rPr lang="en-US" sz="2000" dirty="0">
+                <a:solidFill>
+                  <a:schemeClr val="accent6">
+                    <a:lumMod val="60000"/>
+                    <a:lumOff val="40000"/>
+                  </a:schemeClr>
+                </a:solidFill>
+              </a:rPr>
+              <a:t>Answer</a:t>
+            </a:r>
+          </a:p>
+          <a:p>
+            <a:endParaRPr lang="en-US" sz="2000" b="1" dirty="0">
               <a:solidFill>
                 <a:schemeClr val="accent6">
                   <a:lumMod val="60000"/>
@@ -6205,118 +8759,37 @@
             </a:endParaRPr>
           </a:p>
           <a:p>
-            <a:endParaRPr lang="en-US" sz="2400" dirty="0">
-              <a:solidFill>
-                <a:schemeClr val="accent6">
-                  <a:lumMod val="60000"/>
-                  <a:lumOff val="40000"/>
-                </a:schemeClr>
-              </a:solidFill>
-            </a:endParaRPr>
-          </a:p>
-          <a:p>
-            <a:r>
-              <a:rPr lang="en-US" sz="2400" dirty="0">
-                <a:solidFill>
-                  <a:schemeClr val="accent6">
-                    <a:lumMod val="60000"/>
-                    <a:lumOff val="40000"/>
-                  </a:schemeClr>
-                </a:solidFill>
-              </a:rPr>
-              <a:t>Prompt:</a:t>
-            </a:r>
-          </a:p>
-          <a:p>
-            <a:r>
-              <a:rPr lang="en-US" sz="2400" dirty="0">
-                <a:solidFill>
-                  <a:schemeClr val="accent4">
-                    <a:lumMod val="60000"/>
-                    <a:lumOff val="40000"/>
-                  </a:schemeClr>
-                </a:solidFill>
-              </a:rPr>
-              <a:t>Write an email requesting leave.</a:t>
-            </a:r>
-          </a:p>
-          <a:p>
-            <a:endParaRPr lang="en-US" sz="2400" dirty="0">
-              <a:solidFill>
-                <a:schemeClr val="accent6">
-                  <a:lumMod val="60000"/>
-                  <a:lumOff val="40000"/>
-                </a:schemeClr>
-              </a:solidFill>
-            </a:endParaRPr>
-          </a:p>
-          <a:p>
-            <a:endParaRPr lang="en-US" sz="2400" dirty="0">
-              <a:solidFill>
-                <a:schemeClr val="accent6">
-                  <a:lumMod val="60000"/>
-                  <a:lumOff val="40000"/>
-                </a:schemeClr>
-              </a:solidFill>
-            </a:endParaRPr>
-          </a:p>
-          <a:p>
-            <a:r>
-              <a:rPr lang="en-US" sz="2400" dirty="0">
-                <a:solidFill>
-                  <a:schemeClr val="accent6">
-                    <a:lumMod val="60000"/>
-                    <a:lumOff val="40000"/>
-                  </a:schemeClr>
-                </a:solidFill>
-              </a:rPr>
-              <a:t>AI provides one response without quality review.</a:t>
+            <a:r>
+              <a:rPr lang="en-US" sz="2000" b="1" dirty="0">
+                <a:solidFill>
+                  <a:schemeClr val="accent6">
+                    <a:lumMod val="60000"/>
+                    <a:lumOff val="40000"/>
+                  </a:schemeClr>
+                </a:solidFill>
+              </a:rPr>
+              <a:t>Components Required: </a:t>
+            </a:r>
+            <a:r>
+              <a:rPr lang="en-US" sz="2000" dirty="0">
+                <a:solidFill>
+                  <a:schemeClr val="accent6">
+                    <a:lumMod val="60000"/>
+                    <a:lumOff val="40000"/>
+                  </a:schemeClr>
+                </a:solidFill>
+              </a:rPr>
+              <a:t>PDF Parser, Text Chunking, Embedding Model, Vector Database, Retriever, LLM </a:t>
             </a:r>
           </a:p>
         </p:txBody>
       </p:sp>
-    </p:spTree>
-    <p:extLst>
-      <p:ext uri="{BB962C8B-B14F-4D97-AF65-F5344CB8AC3E}">
-        <p14:creationId xmlns:p14="http://schemas.microsoft.com/office/powerpoint/2010/main" val="3742128469"/>
-      </p:ext>
-    </p:extLst>
-  </p:cSld>
-  <p:clrMapOvr>
-    <a:masterClrMapping/>
-  </p:clrMapOvr>
-</p:sld>
-</file>
-
-<file path=ppt/slides/slide8.xml><?xml version="1.0" encoding="utf-8"?>
-<p:sld xmlns:a="http://schemas.openxmlformats.org/drawingml/2006/main" xmlns:r="http://schemas.openxmlformats.org/officeDocument/2006/relationships" xmlns:p="http://schemas.openxmlformats.org/presentationml/2006/main">
-  <p:cSld>
-    <p:spTree>
-      <p:nvGrpSpPr>
-        <p:cNvPr id="1" name="">
-          <a:extLst>
-            <a:ext uri="{FF2B5EF4-FFF2-40B4-BE49-F238E27FC236}">
-              <a16:creationId xmlns:a16="http://schemas.microsoft.com/office/drawing/2014/main" id="{C5E463A9-2625-55E3-688F-2A075A045994}"/>
-            </a:ext>
-          </a:extLst>
-        </p:cNvPr>
-        <p:cNvGrpSpPr/>
-        <p:nvPr/>
-      </p:nvGrpSpPr>
-      <p:grpSpPr>
-        <a:xfrm>
-          <a:off x="0" y="0"/>
-          <a:ext cx="0" cy="0"/>
-          <a:chOff x="0" y="0"/>
-          <a:chExt cx="0" cy="0"/>
-        </a:xfrm>
-      </p:grpSpPr>
       <p:sp>
         <p:nvSpPr>
-          <p:cNvPr id="4" name="TextBox 3">
+          <p:cNvPr id="6" name="TextBox 5">
             <a:extLst>
               <a:ext uri="{FF2B5EF4-FFF2-40B4-BE49-F238E27FC236}">
-                <a16:creationId xmlns:a16="http://schemas.microsoft.com/office/drawing/2014/main" id="{3E34F403-E6E2-F064-D91B-F6920C2FA603}"/>
+                <a16:creationId xmlns:a16="http://schemas.microsoft.com/office/drawing/2014/main" id="{F4DE56D0-DEC8-B827-B5BA-D573CC29A0AC}"/>
               </a:ext>
             </a:extLst>
           </p:cNvPr>
@@ -6325,8 +8798,8 @@
         </p:nvSpPr>
         <p:spPr>
           <a:xfrm>
-            <a:off x="594360" y="962098"/>
-            <a:ext cx="10780776" cy="4524315"/>
+            <a:off x="6614160" y="671691"/>
+            <a:ext cx="6190488" cy="3477875"/>
           </a:xfrm>
           <a:prstGeom prst="rect">
             <a:avLst/>
@@ -6340,28 +8813,84 @@
           <a:lstStyle/>
           <a:p>
             <a:r>
-              <a:rPr lang="en-US" sz="2400" b="1" dirty="0">
-                <a:solidFill>
-                  <a:schemeClr val="accent6">
-                    <a:lumMod val="60000"/>
-                    <a:lumOff val="40000"/>
-                  </a:schemeClr>
-                </a:solidFill>
-              </a:rPr>
-              <a:t>Example With </a:t>
-            </a:r>
-            <a:r>
-              <a:rPr lang="en-US" sz="2400" b="1" dirty="0" err="1">
-                <a:solidFill>
-                  <a:schemeClr val="accent6">
-                    <a:lumMod val="60000"/>
-                    <a:lumOff val="40000"/>
-                  </a:schemeClr>
-                </a:solidFill>
-              </a:rPr>
-              <a:t>Reflexion</a:t>
-            </a:r>
-            <a:endParaRPr lang="en-US" sz="2400" b="1" dirty="0">
+              <a:rPr lang="en-US" sz="2000" b="1" dirty="0">
+                <a:solidFill>
+                  <a:schemeClr val="accent6">
+                    <a:lumMod val="60000"/>
+                    <a:lumOff val="40000"/>
+                  </a:schemeClr>
+                </a:solidFill>
+              </a:rPr>
+              <a:t>Advantages</a:t>
+            </a:r>
+          </a:p>
+          <a:p>
+            <a:r>
+              <a:rPr lang="en-US" sz="2000" dirty="0">
+                <a:solidFill>
+                  <a:schemeClr val="accent6">
+                    <a:lumMod val="60000"/>
+                    <a:lumOff val="40000"/>
+                  </a:schemeClr>
+                </a:solidFill>
+              </a:rPr>
+              <a:t>✅ Handles thousands of pages</a:t>
+            </a:r>
+          </a:p>
+          <a:p>
+            <a:r>
+              <a:rPr lang="en-US" sz="2000" dirty="0">
+                <a:solidFill>
+                  <a:schemeClr val="accent6">
+                    <a:lumMod val="60000"/>
+                    <a:lumOff val="40000"/>
+                  </a:schemeClr>
+                </a:solidFill>
+              </a:rPr>
+              <a:t>✅ Much cheaper than sending entire PDFs</a:t>
+            </a:r>
+          </a:p>
+          <a:p>
+            <a:r>
+              <a:rPr lang="en-US" sz="2000" dirty="0">
+                <a:solidFill>
+                  <a:schemeClr val="accent6">
+                    <a:lumMod val="60000"/>
+                    <a:lumOff val="40000"/>
+                  </a:schemeClr>
+                </a:solidFill>
+              </a:rPr>
+              <a:t>✅ Fast retrieval</a:t>
+            </a:r>
+          </a:p>
+          <a:p>
+            <a:r>
+              <a:rPr lang="en-US" sz="2000" dirty="0">
+                <a:solidFill>
+                  <a:schemeClr val="accent6">
+                    <a:lumMod val="60000"/>
+                    <a:lumOff val="40000"/>
+                  </a:schemeClr>
+                </a:solidFill>
+              </a:rPr>
+              <a:t>✅ Scales well</a:t>
+            </a:r>
+          </a:p>
+          <a:p>
+            <a:r>
+              <a:rPr lang="en-US" sz="2000" dirty="0">
+                <a:solidFill>
+                  <a:schemeClr val="accent6">
+                    <a:lumMod val="60000"/>
+                    <a:lumOff val="40000"/>
+                  </a:schemeClr>
+                </a:solidFill>
+              </a:rPr>
+              <a:t>✅ Industry standard approach</a:t>
+            </a:r>
+          </a:p>
+          <a:p>
+            <a:endParaRPr lang="en-US" sz="2000" dirty="0">
               <a:solidFill>
                 <a:schemeClr val="accent6">
                   <a:lumMod val="60000"/>
@@ -6371,137 +8900,55 @@
             </a:endParaRPr>
           </a:p>
           <a:p>
-            <a:endParaRPr lang="en-US" sz="2400" dirty="0">
-              <a:solidFill>
-                <a:schemeClr val="accent6">
-                  <a:lumMod val="60000"/>
-                  <a:lumOff val="40000"/>
-                </a:schemeClr>
-              </a:solidFill>
-            </a:endParaRPr>
-          </a:p>
-          <a:p>
-            <a:r>
-              <a:rPr lang="en-US" sz="2400" dirty="0">
-                <a:solidFill>
-                  <a:schemeClr val="accent6">
-                    <a:lumMod val="60000"/>
-                    <a:lumOff val="40000"/>
-                  </a:schemeClr>
-                </a:solidFill>
-              </a:rPr>
-              <a:t>Prompt:</a:t>
-            </a:r>
-          </a:p>
-          <a:p>
-            <a:r>
-              <a:rPr lang="en-US" sz="2400" dirty="0">
-                <a:solidFill>
-                  <a:schemeClr val="accent4">
-                    <a:lumMod val="60000"/>
-                    <a:lumOff val="40000"/>
-                  </a:schemeClr>
-                </a:solidFill>
-              </a:rPr>
-              <a:t>Write an email requesting leave.</a:t>
-            </a:r>
-          </a:p>
-          <a:p>
-            <a:r>
-              <a:rPr lang="en-US" sz="2400" dirty="0">
-                <a:solidFill>
-                  <a:schemeClr val="accent4">
-                    <a:lumMod val="60000"/>
-                    <a:lumOff val="40000"/>
-                  </a:schemeClr>
-                </a:solidFill>
-              </a:rPr>
-              <a:t> </a:t>
-            </a:r>
-          </a:p>
-          <a:p>
-            <a:r>
-              <a:rPr lang="en-US" sz="2400" dirty="0">
-                <a:solidFill>
-                  <a:schemeClr val="accent4">
-                    <a:lumMod val="60000"/>
-                    <a:lumOff val="40000"/>
-                  </a:schemeClr>
-                </a:solidFill>
-              </a:rPr>
-              <a:t>After writing the email:</a:t>
-            </a:r>
-          </a:p>
-          <a:p>
-            <a:r>
-              <a:rPr lang="en-US" sz="2400" dirty="0">
-                <a:solidFill>
-                  <a:schemeClr val="accent4">
-                    <a:lumMod val="60000"/>
-                    <a:lumOff val="40000"/>
-                  </a:schemeClr>
-                </a:solidFill>
-              </a:rPr>
-              <a:t>1. Review the email for clarity and professionalism.</a:t>
-            </a:r>
-          </a:p>
-          <a:p>
-            <a:r>
-              <a:rPr lang="en-US" sz="2400" dirty="0">
-                <a:solidFill>
-                  <a:schemeClr val="accent4">
-                    <a:lumMod val="60000"/>
-                    <a:lumOff val="40000"/>
-                  </a:schemeClr>
-                </a:solidFill>
-              </a:rPr>
-              <a:t>2. Suggest improvements.</a:t>
-            </a:r>
-          </a:p>
-          <a:p>
-            <a:r>
-              <a:rPr lang="en-US" sz="2400" dirty="0">
-                <a:solidFill>
-                  <a:schemeClr val="accent4">
-                    <a:lumMod val="60000"/>
-                    <a:lumOff val="40000"/>
-                  </a:schemeClr>
-                </a:solidFill>
-              </a:rPr>
-              <a:t>3. Provide a revised version.</a:t>
-            </a:r>
-          </a:p>
-          <a:p>
-            <a:endParaRPr lang="en-US" sz="2400" dirty="0">
-              <a:solidFill>
-                <a:schemeClr val="accent6">
-                  <a:lumMod val="60000"/>
-                  <a:lumOff val="40000"/>
-                </a:schemeClr>
-              </a:solidFill>
-            </a:endParaRPr>
-          </a:p>
-          <a:p>
-            <a:endParaRPr lang="en-US" sz="2400" dirty="0">
-              <a:solidFill>
-                <a:schemeClr val="accent6">
-                  <a:lumMod val="60000"/>
-                  <a:lumOff val="40000"/>
-                </a:schemeClr>
-              </a:solidFill>
-            </a:endParaRPr>
-          </a:p>
-          <a:p>
-            <a:r>
-              <a:rPr lang="en-US" sz="2400" dirty="0">
-                <a:solidFill>
-                  <a:schemeClr val="accent6">
-                    <a:lumMod val="60000"/>
-                    <a:lumOff val="40000"/>
-                  </a:schemeClr>
-                </a:solidFill>
-              </a:rPr>
-              <a:t>This produces higher quality results.</a:t>
+            <a:r>
+              <a:rPr lang="en-US" sz="2000" b="1" dirty="0">
+                <a:solidFill>
+                  <a:schemeClr val="accent6">
+                    <a:lumMod val="60000"/>
+                    <a:lumOff val="40000"/>
+                  </a:schemeClr>
+                </a:solidFill>
+              </a:rPr>
+              <a:t>Limitations</a:t>
+            </a:r>
+          </a:p>
+          <a:p>
+            <a:r>
+              <a:rPr lang="en-US" sz="2000" dirty="0">
+                <a:solidFill>
+                  <a:schemeClr val="accent6">
+                    <a:lumMod val="60000"/>
+                    <a:lumOff val="40000"/>
+                  </a:schemeClr>
+                </a:solidFill>
+              </a:rPr>
+              <a:t>❌ Retrieval can miss relevant chunks</a:t>
+            </a:r>
+          </a:p>
+          <a:p>
+            <a:r>
+              <a:rPr lang="en-US" sz="2000" dirty="0">
+                <a:solidFill>
+                  <a:schemeClr val="accent6">
+                    <a:lumMod val="60000"/>
+                    <a:lumOff val="40000"/>
+                  </a:schemeClr>
+                </a:solidFill>
+              </a:rPr>
+              <a:t>❌ Chunking strategy affects performance</a:t>
+            </a:r>
+          </a:p>
+          <a:p>
+            <a:r>
+              <a:rPr lang="en-US" sz="2000" dirty="0">
+                <a:solidFill>
+                  <a:schemeClr val="accent6">
+                    <a:lumMod val="60000"/>
+                    <a:lumOff val="40000"/>
+                  </a:schemeClr>
+                </a:solidFill>
+              </a:rPr>
+              <a:t>❌ Requires vector database infrastructure</a:t>
             </a:r>
           </a:p>
         </p:txBody>
@@ -6509,237 +8956,7 @@
     </p:spTree>
     <p:extLst>
       <p:ext uri="{BB962C8B-B14F-4D97-AF65-F5344CB8AC3E}">
-        <p14:creationId xmlns:p14="http://schemas.microsoft.com/office/powerpoint/2010/main" val="1924586452"/>
-      </p:ext>
-    </p:extLst>
-  </p:cSld>
-  <p:clrMapOvr>
-    <a:masterClrMapping/>
-  </p:clrMapOvr>
-</p:sld>
-</file>
-
-<file path=ppt/slides/slide9.xml><?xml version="1.0" encoding="utf-8"?>
-<p:sld xmlns:a="http://schemas.openxmlformats.org/drawingml/2006/main" xmlns:r="http://schemas.openxmlformats.org/officeDocument/2006/relationships" xmlns:p="http://schemas.openxmlformats.org/presentationml/2006/main">
-  <p:cSld>
-    <p:spTree>
-      <p:nvGrpSpPr>
-        <p:cNvPr id="1" name="">
-          <a:extLst>
-            <a:ext uri="{FF2B5EF4-FFF2-40B4-BE49-F238E27FC236}">
-              <a16:creationId xmlns:a16="http://schemas.microsoft.com/office/drawing/2014/main" id="{3ACA13FA-1786-D429-BA05-3558AC573E3F}"/>
-            </a:ext>
-          </a:extLst>
-        </p:cNvPr>
-        <p:cNvGrpSpPr/>
-        <p:nvPr/>
-      </p:nvGrpSpPr>
-      <p:grpSpPr>
-        <a:xfrm>
-          <a:off x="0" y="0"/>
-          <a:ext cx="0" cy="0"/>
-          <a:chOff x="0" y="0"/>
-          <a:chExt cx="0" cy="0"/>
-        </a:xfrm>
-      </p:grpSpPr>
-      <p:sp>
-        <p:nvSpPr>
-          <p:cNvPr id="4" name="TextBox 3">
-            <a:extLst>
-              <a:ext uri="{FF2B5EF4-FFF2-40B4-BE49-F238E27FC236}">
-                <a16:creationId xmlns:a16="http://schemas.microsoft.com/office/drawing/2014/main" id="{4403FB27-8A7A-B0AC-D783-939BCC710AD6}"/>
-              </a:ext>
-            </a:extLst>
-          </p:cNvPr>
-          <p:cNvSpPr txBox="1"/>
-          <p:nvPr/>
-        </p:nvSpPr>
-        <p:spPr>
-          <a:xfrm>
-            <a:off x="594360" y="962098"/>
-            <a:ext cx="10780776" cy="3416320"/>
-          </a:xfrm>
-          <a:prstGeom prst="rect">
-            <a:avLst/>
-          </a:prstGeom>
-          <a:noFill/>
-        </p:spPr>
-        <p:txBody>
-          <a:bodyPr wrap="square">
-            <a:spAutoFit/>
-          </a:bodyPr>
-          <a:lstStyle/>
-          <a:p>
-            <a:r>
-              <a:rPr lang="en-US" sz="2400" b="1" dirty="0">
-                <a:solidFill>
-                  <a:schemeClr val="accent6">
-                    <a:lumMod val="60000"/>
-                    <a:lumOff val="40000"/>
-                  </a:schemeClr>
-                </a:solidFill>
-              </a:rPr>
-              <a:t>When to Use </a:t>
-            </a:r>
-            <a:r>
-              <a:rPr lang="en-US" sz="2400" b="1" dirty="0" err="1">
-                <a:solidFill>
-                  <a:schemeClr val="accent6">
-                    <a:lumMod val="60000"/>
-                    <a:lumOff val="40000"/>
-                  </a:schemeClr>
-                </a:solidFill>
-              </a:rPr>
-              <a:t>Reflexion</a:t>
-            </a:r>
-            <a:endParaRPr lang="en-US" sz="2400" b="1" dirty="0">
-              <a:solidFill>
-                <a:schemeClr val="accent6">
-                  <a:lumMod val="60000"/>
-                  <a:lumOff val="40000"/>
-                </a:schemeClr>
-              </a:solidFill>
-            </a:endParaRPr>
-          </a:p>
-          <a:p>
-            <a:endParaRPr lang="en-US" sz="2400" dirty="0">
-              <a:solidFill>
-                <a:schemeClr val="accent6">
-                  <a:lumMod val="60000"/>
-                  <a:lumOff val="40000"/>
-                </a:schemeClr>
-              </a:solidFill>
-            </a:endParaRPr>
-          </a:p>
-          <a:p>
-            <a:r>
-              <a:rPr lang="en-US" sz="2400" dirty="0" err="1">
-                <a:solidFill>
-                  <a:schemeClr val="accent6">
-                    <a:lumMod val="60000"/>
-                    <a:lumOff val="40000"/>
-                  </a:schemeClr>
-                </a:solidFill>
-              </a:rPr>
-              <a:t>Reflexion</a:t>
-            </a:r>
-            <a:r>
-              <a:rPr lang="en-US" sz="2400" dirty="0">
-                <a:solidFill>
-                  <a:schemeClr val="accent6">
-                    <a:lumMod val="60000"/>
-                    <a:lumOff val="40000"/>
-                  </a:schemeClr>
-                </a:solidFill>
-              </a:rPr>
-              <a:t> is particularly useful for:</a:t>
-            </a:r>
-          </a:p>
-          <a:p>
-            <a:pPr marL="342900" lvl="0" indent="-342900">
-              <a:buFont typeface="Arial" panose="020B0604020202020204" pitchFamily="34" charset="0"/>
-              <a:buChar char="•"/>
-            </a:pPr>
-            <a:r>
-              <a:rPr lang="en-US" sz="2400" dirty="0">
-                <a:solidFill>
-                  <a:schemeClr val="accent6">
-                    <a:lumMod val="60000"/>
-                    <a:lumOff val="40000"/>
-                  </a:schemeClr>
-                </a:solidFill>
-              </a:rPr>
-              <a:t>Writing tasks</a:t>
-            </a:r>
-          </a:p>
-          <a:p>
-            <a:pPr marL="342900" lvl="0" indent="-342900">
-              <a:buFont typeface="Arial" panose="020B0604020202020204" pitchFamily="34" charset="0"/>
-              <a:buChar char="•"/>
-            </a:pPr>
-            <a:r>
-              <a:rPr lang="en-US" sz="2400" dirty="0">
-                <a:solidFill>
-                  <a:schemeClr val="accent6">
-                    <a:lumMod val="60000"/>
-                    <a:lumOff val="40000"/>
-                  </a:schemeClr>
-                </a:solidFill>
-              </a:rPr>
-              <a:t>Coding improvement</a:t>
-            </a:r>
-          </a:p>
-          <a:p>
-            <a:pPr marL="342900" lvl="0" indent="-342900">
-              <a:buFont typeface="Arial" panose="020B0604020202020204" pitchFamily="34" charset="0"/>
-              <a:buChar char="•"/>
-            </a:pPr>
-            <a:r>
-              <a:rPr lang="en-US" sz="2400" dirty="0">
-                <a:solidFill>
-                  <a:schemeClr val="accent6">
-                    <a:lumMod val="60000"/>
-                    <a:lumOff val="40000"/>
-                  </a:schemeClr>
-                </a:solidFill>
-              </a:rPr>
-              <a:t>Research summaries</a:t>
-            </a:r>
-          </a:p>
-          <a:p>
-            <a:pPr marL="342900" lvl="0" indent="-342900">
-              <a:buFont typeface="Arial" panose="020B0604020202020204" pitchFamily="34" charset="0"/>
-              <a:buChar char="•"/>
-            </a:pPr>
-            <a:r>
-              <a:rPr lang="en-US" sz="2400" dirty="0">
-                <a:solidFill>
-                  <a:schemeClr val="accent6">
-                    <a:lumMod val="60000"/>
-                    <a:lumOff val="40000"/>
-                  </a:schemeClr>
-                </a:solidFill>
-              </a:rPr>
-              <a:t>Report generation</a:t>
-            </a:r>
-          </a:p>
-          <a:p>
-            <a:pPr marL="342900" lvl="0" indent="-342900">
-              <a:buFont typeface="Arial" panose="020B0604020202020204" pitchFamily="34" charset="0"/>
-              <a:buChar char="•"/>
-            </a:pPr>
-            <a:r>
-              <a:rPr lang="en-US" sz="2400" dirty="0">
-                <a:solidFill>
-                  <a:schemeClr val="accent6">
-                    <a:lumMod val="60000"/>
-                    <a:lumOff val="40000"/>
-                  </a:schemeClr>
-                </a:solidFill>
-              </a:rPr>
-              <a:t>Professional communication</a:t>
-            </a:r>
-          </a:p>
-          <a:p>
-            <a:pPr marL="342900" lvl="0" indent="-342900">
-              <a:buFont typeface="Arial" panose="020B0604020202020204" pitchFamily="34" charset="0"/>
-              <a:buChar char="•"/>
-            </a:pPr>
-            <a:endParaRPr lang="en-US" sz="2400" dirty="0">
-              <a:solidFill>
-                <a:schemeClr val="accent6">
-                  <a:lumMod val="60000"/>
-                  <a:lumOff val="40000"/>
-                </a:schemeClr>
-              </a:solidFill>
-            </a:endParaRPr>
-          </a:p>
-        </p:txBody>
-      </p:sp>
-    </p:spTree>
-    <p:extLst>
-      <p:ext uri="{BB962C8B-B14F-4D97-AF65-F5344CB8AC3E}">
-        <p14:creationId xmlns:p14="http://schemas.microsoft.com/office/powerpoint/2010/main" val="2730046639"/>
+        <p14:creationId xmlns:p14="http://schemas.microsoft.com/office/powerpoint/2010/main" val="2987231860"/>
       </p:ext>
     </p:extLst>
   </p:cSld>
